--- a/1.4 JD+ on Github.pptx
+++ b/1.4 JD+ on Github.pptx
@@ -5,10 +5,10 @@
     <p:sldMasterId id="2147483648" r:id="rId4"/>
   </p:sldMasterIdLst>
   <p:notesMasterIdLst>
-    <p:notesMasterId r:id="rId17"/>
+    <p:notesMasterId r:id="rId16"/>
   </p:notesMasterIdLst>
   <p:handoutMasterIdLst>
-    <p:handoutMasterId r:id="rId18"/>
+    <p:handoutMasterId r:id="rId17"/>
   </p:handoutMasterIdLst>
   <p:sldIdLst>
     <p:sldId id="256" r:id="rId5"/>
@@ -20,14 +20,13 @@
     <p:sldId id="266" r:id="rId11"/>
     <p:sldId id="260" r:id="rId12"/>
     <p:sldId id="267" r:id="rId13"/>
-    <p:sldId id="268" r:id="rId14"/>
-    <p:sldId id="269" r:id="rId15"/>
-    <p:sldId id="261" r:id="rId16"/>
+    <p:sldId id="269" r:id="rId14"/>
+    <p:sldId id="261" r:id="rId15"/>
   </p:sldIdLst>
   <p:sldSz cx="12192000" cy="6858000"/>
   <p:notesSz cx="6858000" cy="9144000"/>
   <p:custDataLst>
-    <p:tags r:id="rId19"/>
+    <p:tags r:id="rId18"/>
   </p:custDataLst>
   <p:defaultTextStyle>
     <a:defPPr marR="0" lvl="0" algn="l" rtl="0">
@@ -277,7 +276,7 @@
       <p15:notesGuideLst xmlns:p15="http://schemas.microsoft.com/office/powerpoint/2012/main"/>
     </p:ext>
     <p:ext uri="http://customooxmlschemas.google.com/">
-      <go:slidesCustomData xmlns:mc="http://schemas.openxmlformats.org/markup-compatibility/2006" xmlns:mv="urn:schemas-microsoft-com:mac:vml" xmlns:c="http://schemas.openxmlformats.org/drawingml/2006/chart" xmlns:dgm="http://schemas.openxmlformats.org/drawingml/2006/diagram" xmlns:o="urn:schemas-microsoft-com:office:office" xmlns:v="urn:schemas-microsoft-com:vml" xmlns:pvml="urn:schemas-microsoft-com:office:powerpoint" xmlns:com="http://schemas.openxmlformats.org/drawingml/2006/compatibility" xmlns:p14="http://schemas.microsoft.com/office/powerpoint/2010/main" xmlns:p15="http://schemas.microsoft.com/office/powerpoint/2012/main" xmlns:ahyp="http://schemas.microsoft.com/office/drawing/2018/hyperlinkcolor" xmlns:go="http://customooxmlschemas.google.com/" xmlns="" r:id="rId59" roundtripDataSignature="AMtx7mh3YP3xexYcFoahXa2ehi0H5V4Zaw=="/>
+      <go:slidesCustomData xmlns="" xmlns:go="http://customooxmlschemas.google.com/" xmlns:ahyp="http://schemas.microsoft.com/office/drawing/2018/hyperlinkcolor" xmlns:p15="http://schemas.microsoft.com/office/powerpoint/2012/main" xmlns:p14="http://schemas.microsoft.com/office/powerpoint/2010/main" xmlns:com="http://schemas.openxmlformats.org/drawingml/2006/compatibility" xmlns:pvml="urn:schemas-microsoft-com:office:powerpoint" xmlns:v="urn:schemas-microsoft-com:vml" xmlns:o="urn:schemas-microsoft-com:office:office" xmlns:dgm="http://schemas.openxmlformats.org/drawingml/2006/diagram" xmlns:c="http://schemas.openxmlformats.org/drawingml/2006/chart" xmlns:mv="urn:schemas-microsoft-com:mac:vml" xmlns:mc="http://schemas.openxmlformats.org/markup-compatibility/2006" r:id="rId59" roundtripDataSignature="AMtx7mh3YP3xexYcFoahXa2ehi0H5V4Zaw=="/>
     </p:ext>
   </p:extLst>
 </p:presentation>
@@ -377,7 +376,7 @@
           <a:p>
             <a:fld id="{0CBFB8CE-488C-4A7E-87F2-3AF6127C51C1}" type="datetimeFigureOut">
               <a:rPr lang="en-IE" smtClean="0"/>
-              <a:t>27/08/2026</a:t>
+              <a:t>22/09/2026</a:t>
             </a:fld>
             <a:endParaRPr lang="en-IE"/>
           </a:p>
@@ -6301,227 +6300,6 @@
       </p:grpSpPr>
       <p:sp>
         <p:nvSpPr>
-          <p:cNvPr id="2" name="Title 1">
-            <a:extLst>
-              <a:ext uri="{FF2B5EF4-FFF2-40B4-BE49-F238E27FC236}">
-                <a16:creationId xmlns:a16="http://schemas.microsoft.com/office/drawing/2014/main" id="{9BBA7961-20B3-4AC6-96F6-A10F14DE4EEC}"/>
-              </a:ext>
-            </a:extLst>
-          </p:cNvPr>
-          <p:cNvSpPr>
-            <a:spLocks noGrp="1"/>
-          </p:cNvSpPr>
-          <p:nvPr>
-            <p:ph type="title"/>
-          </p:nvPr>
-        </p:nvSpPr>
-        <p:spPr/>
-        <p:txBody>
-          <a:bodyPr/>
-          <a:lstStyle/>
-          <a:p>
-            <a:r>
-              <a:rPr lang="en-GB" dirty="0" err="1"/>
-              <a:t>JDemetra</a:t>
-            </a:r>
-            <a:r>
-              <a:rPr lang="en-GB" dirty="0"/>
-              <a:t>+ resources on </a:t>
-            </a:r>
-            <a:r>
-              <a:rPr lang="en-GB" dirty="0" err="1"/>
-              <a:t>Github</a:t>
-            </a:r>
-            <a:endParaRPr lang="en-GB" dirty="0"/>
-          </a:p>
-        </p:txBody>
-      </p:sp>
-      <p:sp>
-        <p:nvSpPr>
-          <p:cNvPr id="3" name="Content Placeholder 2">
-            <a:extLst>
-              <a:ext uri="{FF2B5EF4-FFF2-40B4-BE49-F238E27FC236}">
-                <a16:creationId xmlns:a16="http://schemas.microsoft.com/office/drawing/2014/main" id="{C6F4D24D-0EA9-4E56-AC68-FF4359E49ACA}"/>
-              </a:ext>
-            </a:extLst>
-          </p:cNvPr>
-          <p:cNvSpPr>
-            <a:spLocks noGrp="1"/>
-          </p:cNvSpPr>
-          <p:nvPr>
-            <p:ph idx="1"/>
-          </p:nvPr>
-        </p:nvSpPr>
-        <p:spPr/>
-        <p:txBody>
-          <a:bodyPr/>
-          <a:lstStyle/>
-          <a:p>
-            <a:r>
-              <a:rPr lang="en-GB" sz="2300" dirty="0"/>
-              <a:t>Additional plug-ins (NBB)</a:t>
-            </a:r>
-          </a:p>
-          <a:p>
-            <a:pPr lvl="1"/>
-            <a:r>
-              <a:rPr lang="en-GB" dirty="0">
-                <a:hlinkClick r:id="rId2"/>
-              </a:rPr>
-              <a:t>https://github.com/nbbrd/jdemetra-sa-advanced/releases/tag/v2.2.3</a:t>
-            </a:r>
-            <a:r>
-              <a:rPr lang="en-GB" dirty="0"/>
-              <a:t>  </a:t>
-            </a:r>
-          </a:p>
-          <a:p>
-            <a:pPr lvl="2"/>
-            <a:r>
-              <a:rPr lang="en-GB" sz="1700" dirty="0"/>
-              <a:t>Temporal disaggregation / benchmarking (</a:t>
-            </a:r>
-            <a:r>
-              <a:rPr lang="en-GB" sz="1700" dirty="0" err="1"/>
-              <a:t>nbdemetra</a:t>
-            </a:r>
-            <a:r>
-              <a:rPr lang="en-GB" sz="1700" dirty="0"/>
-              <a:t>-benchmarking)</a:t>
-            </a:r>
-          </a:p>
-          <a:p>
-            <a:pPr lvl="2"/>
-            <a:r>
-              <a:rPr lang="en-GB" sz="1700" dirty="0"/>
-              <a:t>Structural time series (</a:t>
-            </a:r>
-            <a:r>
-              <a:rPr lang="en-GB" sz="1700" dirty="0" err="1"/>
-              <a:t>nbdemetra-sts</a:t>
-            </a:r>
-            <a:r>
-              <a:rPr lang="en-GB" sz="1700" dirty="0"/>
-              <a:t>)</a:t>
-            </a:r>
-          </a:p>
-          <a:p>
-            <a:pPr lvl="2"/>
-            <a:r>
-              <a:rPr lang="en-GB" sz="1700" dirty="0"/>
-              <a:t>…</a:t>
-            </a:r>
-          </a:p>
-          <a:p>
-            <a:pPr lvl="1"/>
-            <a:r>
-              <a:rPr lang="en-GB" dirty="0">
-                <a:hlinkClick r:id="rId3"/>
-              </a:rPr>
-              <a:t>https://github.com/nbbrd/jdemetra-dotstat/releases/tag/v2.2.5</a:t>
-            </a:r>
-            <a:endParaRPr lang="en-GB" dirty="0"/>
-          </a:p>
-          <a:p>
-            <a:pPr lvl="2"/>
-            <a:r>
-              <a:rPr lang="en-GB" sz="1700" dirty="0"/>
-              <a:t>Time series from SDMX Web services</a:t>
-            </a:r>
-          </a:p>
-          <a:p>
-            <a:pPr lvl="1"/>
-            <a:r>
-              <a:rPr lang="en-GB" dirty="0"/>
-              <a:t>…</a:t>
-            </a:r>
-          </a:p>
-          <a:p>
-            <a:pPr lvl="2"/>
-            <a:r>
-              <a:rPr lang="en-GB" sz="1700" dirty="0"/>
-              <a:t>Nowcasting by means of dynamic factor models</a:t>
-            </a:r>
-          </a:p>
-          <a:p>
-            <a:pPr lvl="1"/>
-            <a:endParaRPr lang="en-GB" dirty="0"/>
-          </a:p>
-          <a:p>
-            <a:pPr lvl="1"/>
-            <a:endParaRPr lang="en-GB" dirty="0"/>
-          </a:p>
-          <a:p>
-            <a:pPr lvl="1"/>
-            <a:endParaRPr lang="en-GB" dirty="0"/>
-          </a:p>
-          <a:p>
-            <a:pPr lvl="1"/>
-            <a:endParaRPr lang="en-GB" dirty="0"/>
-          </a:p>
-        </p:txBody>
-      </p:sp>
-      <p:sp>
-        <p:nvSpPr>
-          <p:cNvPr id="5" name="Espace réservé du pied de page 4">
-            <a:extLst>
-              <a:ext uri="{FF2B5EF4-FFF2-40B4-BE49-F238E27FC236}">
-                <a16:creationId xmlns:a16="http://schemas.microsoft.com/office/drawing/2014/main" id="{5E72656A-C10B-2C3C-F182-1E386CA6FC3C}"/>
-              </a:ext>
-            </a:extLst>
-          </p:cNvPr>
-          <p:cNvSpPr>
-            <a:spLocks noGrp="1"/>
-          </p:cNvSpPr>
-          <p:nvPr>
-            <p:ph type="ftr" sz="quarter" idx="11"/>
-          </p:nvPr>
-        </p:nvSpPr>
-        <p:spPr/>
-        <p:txBody>
-          <a:bodyPr/>
-          <a:lstStyle/>
-          <a:p>
-            <a:r>
-              <a:rPr lang="en-US"/>
-              <a:t>JD+ on Github</a:t>
-            </a:r>
-            <a:endParaRPr lang="en-GB"/>
-          </a:p>
-        </p:txBody>
-      </p:sp>
-    </p:spTree>
-    <p:extLst>
-      <p:ext uri="{BB962C8B-B14F-4D97-AF65-F5344CB8AC3E}">
-        <p14:creationId xmlns:p14="http://schemas.microsoft.com/office/powerpoint/2010/main" val="584120117"/>
-      </p:ext>
-    </p:extLst>
-  </p:cSld>
-  <p:clrMapOvr>
-    <a:masterClrMapping/>
-  </p:clrMapOvr>
-</p:sld>
-</file>
-
-<file path=ppt/slides/slide11.xml><?xml version="1.0" encoding="utf-8"?>
-<p:sld xmlns:a="http://schemas.openxmlformats.org/drawingml/2006/main" xmlns:r="http://schemas.openxmlformats.org/officeDocument/2006/relationships" xmlns:p="http://schemas.openxmlformats.org/presentationml/2006/main">
-  <p:cSld>
-    <p:spTree>
-      <p:nvGrpSpPr>
-        <p:cNvPr id="1" name=""/>
-        <p:cNvGrpSpPr/>
-        <p:nvPr/>
-      </p:nvGrpSpPr>
-      <p:grpSpPr>
-        <a:xfrm>
-          <a:off x="0" y="0"/>
-          <a:ext cx="0" cy="0"/>
-          <a:chOff x="0" y="0"/>
-          <a:chExt cx="0" cy="0"/>
-        </a:xfrm>
-      </p:grpSpPr>
-      <p:sp>
-        <p:nvSpPr>
           <p:cNvPr id="2" name="Title 1"/>
           <p:cNvSpPr>
             <a:spLocks noGrp="1"/>
@@ -6614,7 +6392,15 @@
           <a:p>
             <a:r>
               <a:rPr lang="fr-BE" dirty="0" err="1"/>
-              <a:t>Designed</a:t>
+              <a:t>Mainly</a:t>
+            </a:r>
+            <a:r>
+              <a:rPr lang="fr-BE" dirty="0"/>
+              <a:t> </a:t>
+            </a:r>
+            <a:r>
+              <a:rPr lang="fr-BE" dirty="0" err="1"/>
+              <a:t>designed</a:t>
             </a:r>
             <a:r>
               <a:rPr lang="fr-BE" dirty="0"/>
@@ -6771,7 +6557,7 @@
 </p:sld>
 </file>
 
-<file path=ppt/slides/slide12.xml><?xml version="1.0" encoding="utf-8"?>
+<file path=ppt/slides/slide11.xml><?xml version="1.0" encoding="utf-8"?>
 <p:sld xmlns:a="http://schemas.openxmlformats.org/drawingml/2006/main" xmlns:r="http://schemas.openxmlformats.org/officeDocument/2006/relationships" xmlns:p="http://schemas.openxmlformats.org/presentationml/2006/main">
   <p:cSld>
     <p:spTree>
@@ -8345,8 +8131,8 @@
           </a:p>
           <a:p>
             <a:r>
-              <a:rPr lang="en-GB" sz="2300" dirty="0"/>
-              <a:t>Training</a:t>
+              <a:rPr lang="en-GB" dirty="0"/>
+              <a:t>Documentation</a:t>
             </a:r>
           </a:p>
           <a:p>
@@ -8355,11 +8141,40 @@
               <a:rPr lang="en-GB" dirty="0">
                 <a:hlinkClick r:id="rId4"/>
               </a:rPr>
-              <a:t>https://github.com/palatej/estp2024</a:t>
+              <a:t>https://doc.jdemetra.org/</a:t>
             </a:r>
             <a:r>
               <a:rPr lang="en-GB" dirty="0"/>
               <a:t>  </a:t>
+            </a:r>
+          </a:p>
+          <a:p>
+            <a:pPr lvl="1"/>
+            <a:r>
+              <a:rPr lang="en-GB" dirty="0">
+                <a:hlinkClick r:id="rId5"/>
+              </a:rPr>
+              <a:t>https://rjdverse.r-universe.dev/packages</a:t>
+            </a:r>
+            <a:endParaRPr lang="en-GB" dirty="0"/>
+          </a:p>
+          <a:p>
+            <a:r>
+              <a:rPr lang="en-GB" sz="2300" dirty="0"/>
+              <a:t>Training</a:t>
+            </a:r>
+          </a:p>
+          <a:p>
+            <a:pPr lvl="1"/>
+            <a:r>
+              <a:rPr lang="en-GB" dirty="0">
+                <a:hlinkClick r:id="rId6"/>
+              </a:rPr>
+              <a:t>https://github.com/palatej/estp202</a:t>
+            </a:r>
+            <a:r>
+              <a:rPr lang="en-GB" dirty="0"/>
+              <a:t>6  </a:t>
             </a:r>
           </a:p>
           <a:p>
@@ -9293,17 +9108,6 @@
 </file>
 
 <file path=customXml/item1.xml><?xml version="1.0" encoding="utf-8"?>
-<p:properties xmlns:p="http://schemas.microsoft.com/office/2006/metadata/properties" xmlns:xsi="http://www.w3.org/2001/XMLSchema-instance" xmlns:pc="http://schemas.microsoft.com/office/infopath/2007/PartnerControls">
-  <documentManagement>
-    <lcf76f155ced4ddcb4097134ff3c332f xmlns="0e422b70-e85d-4377-8ee0-b6227433d381">
-      <Terms xmlns="http://schemas.microsoft.com/office/infopath/2007/PartnerControls"/>
-    </lcf76f155ced4ddcb4097134ff3c332f>
-    <TaxCatchAll xmlns="199f642e-5af9-486c-ac06-f366742ef41a"/>
-  </documentManagement>
-</p:properties>
-</file>
-
-<file path=customXml/item2.xml><?xml version="1.0" encoding="utf-8"?>
 <ct:contentTypeSchema xmlns:ct="http://schemas.microsoft.com/office/2006/metadata/contentType" xmlns:ma="http://schemas.microsoft.com/office/2006/metadata/properties/metaAttributes" ct:_="" ma:_="" ma:contentTypeName="Document" ma:contentTypeID="0x010100E6AA5C57F8EADE4E9CD6BB064C0C3195" ma:contentTypeVersion="16" ma:contentTypeDescription="Create a new document." ma:contentTypeScope="" ma:versionID="bb51c19a58f458ddcddd050a07659236">
   <xsd:schema xmlns:xsd="http://www.w3.org/2001/XMLSchema" xmlns:xs="http://www.w3.org/2001/XMLSchema" xmlns:p="http://schemas.microsoft.com/office/2006/metadata/properties" xmlns:ns2="0e422b70-e85d-4377-8ee0-b6227433d381" xmlns:ns3="199f642e-5af9-486c-ac06-f366742ef41a" targetNamespace="http://schemas.microsoft.com/office/2006/metadata/properties" ma:root="true" ma:fieldsID="0ee7a3bac0352a48a43420936abd968a" ns2:_="" ns3:_="">
     <xsd:import namespace="0e422b70-e85d-4377-8ee0-b6227433d381"/>
@@ -9544,6 +9348,17 @@
 </ct:contentTypeSchema>
 </file>
 
+<file path=customXml/item2.xml><?xml version="1.0" encoding="utf-8"?>
+<p:properties xmlns:p="http://schemas.microsoft.com/office/2006/metadata/properties" xmlns:xsi="http://www.w3.org/2001/XMLSchema-instance" xmlns:pc="http://schemas.microsoft.com/office/infopath/2007/PartnerControls">
+  <documentManagement>
+    <lcf76f155ced4ddcb4097134ff3c332f xmlns="0e422b70-e85d-4377-8ee0-b6227433d381">
+      <Terms xmlns="http://schemas.microsoft.com/office/infopath/2007/PartnerControls"/>
+    </lcf76f155ced4ddcb4097134ff3c332f>
+    <TaxCatchAll xmlns="199f642e-5af9-486c-ac06-f366742ef41a"/>
+  </documentManagement>
+</p:properties>
+</file>
+
 <file path=customXml/item3.xml><?xml version="1.0" encoding="utf-8"?>
 <?mso-contentType ?>
 <FormTemplates xmlns="http://schemas.microsoft.com/sharepoint/v3/contenttype/forms">
@@ -9554,23 +9369,6 @@
 </file>
 
 <file path=customXml/itemProps1.xml><?xml version="1.0" encoding="utf-8"?>
-<ds:datastoreItem xmlns:ds="http://schemas.openxmlformats.org/officeDocument/2006/customXml" ds:itemID="{2D6C293B-B8B4-4284-A17E-9F9E4C32B25A}">
-  <ds:schemaRefs>
-    <ds:schemaRef ds:uri="http://schemas.microsoft.com/office/2006/documentManagement/types"/>
-    <ds:schemaRef ds:uri="http://purl.org/dc/elements/1.1/"/>
-    <ds:schemaRef ds:uri="http://purl.org/dc/terms/"/>
-    <ds:schemaRef ds:uri="http://purl.org/dc/dcmitype/"/>
-    <ds:schemaRef ds:uri="0e422b70-e85d-4377-8ee0-b6227433d381"/>
-    <ds:schemaRef ds:uri="http://schemas.microsoft.com/office/infopath/2007/PartnerControls"/>
-    <ds:schemaRef ds:uri="199f642e-5af9-486c-ac06-f366742ef41a"/>
-    <ds:schemaRef ds:uri="http://schemas.openxmlformats.org/package/2006/metadata/core-properties"/>
-    <ds:schemaRef ds:uri="http://schemas.microsoft.com/office/2006/metadata/properties"/>
-    <ds:schemaRef ds:uri="http://www.w3.org/XML/1998/namespace"/>
-  </ds:schemaRefs>
-</ds:datastoreItem>
-</file>
-
-<file path=customXml/itemProps2.xml><?xml version="1.0" encoding="utf-8"?>
 <ds:datastoreItem xmlns:ds="http://schemas.openxmlformats.org/officeDocument/2006/customXml" ds:itemID="{04B464EA-1576-49DD-9675-1E3399D4D196}">
   <ds:schemaRefs>
     <ds:schemaRef ds:uri="http://schemas.microsoft.com/office/2006/metadata/contentType"/>
@@ -9589,6 +9387,23 @@
 </ds:datastoreItem>
 </file>
 
+<file path=customXml/itemProps2.xml><?xml version="1.0" encoding="utf-8"?>
+<ds:datastoreItem xmlns:ds="http://schemas.openxmlformats.org/officeDocument/2006/customXml" ds:itemID="{2D6C293B-B8B4-4284-A17E-9F9E4C32B25A}">
+  <ds:schemaRefs>
+    <ds:schemaRef ds:uri="http://schemas.microsoft.com/office/2006/documentManagement/types"/>
+    <ds:schemaRef ds:uri="http://purl.org/dc/elements/1.1/"/>
+    <ds:schemaRef ds:uri="http://purl.org/dc/terms/"/>
+    <ds:schemaRef ds:uri="http://purl.org/dc/dcmitype/"/>
+    <ds:schemaRef ds:uri="0e422b70-e85d-4377-8ee0-b6227433d381"/>
+    <ds:schemaRef ds:uri="http://schemas.microsoft.com/office/infopath/2007/PartnerControls"/>
+    <ds:schemaRef ds:uri="199f642e-5af9-486c-ac06-f366742ef41a"/>
+    <ds:schemaRef ds:uri="http://schemas.openxmlformats.org/package/2006/metadata/core-properties"/>
+    <ds:schemaRef ds:uri="http://schemas.microsoft.com/office/2006/metadata/properties"/>
+    <ds:schemaRef ds:uri="http://www.w3.org/XML/1998/namespace"/>
+  </ds:schemaRefs>
+</ds:datastoreItem>
+</file>
+
 <file path=customXml/itemProps3.xml><?xml version="1.0" encoding="utf-8"?>
 <ds:datastoreItem xmlns:ds="http://schemas.openxmlformats.org/officeDocument/2006/customXml" ds:itemID="{67DD9E9F-9EEB-4105-B29B-819486C2855A}">
   <ds:schemaRefs>

--- a/1.4 JD+ on Github.pptx
+++ b/1.4 JD+ on Github.pptx
@@ -1,6 +1,6 @@
 
 <file path=ppt/presentation.xml><?xml version="1.0" encoding="utf-8"?>
-<p:presentation xmlns:a="http://schemas.openxmlformats.org/drawingml/2006/main" xmlns:r="http://schemas.openxmlformats.org/officeDocument/2006/relationships" xmlns:p="http://schemas.openxmlformats.org/presentationml/2006/main" strictFirstAndLastChars="0" saveSubsetFonts="1" autoCompressPictures="0">
+<p:presentation xmlns:a="http://schemas.openxmlformats.org/drawingml/2006/main" xmlns:r="http://schemas.openxmlformats.org/officeDocument/2006/relationships" xmlns:p="http://schemas.openxmlformats.org/presentationml/2006/main" showSpecialPlsOnTitleSld="0" strictFirstAndLastChars="0" saveSubsetFonts="1" autoCompressPictures="0">
   <p:sldMasterIdLst>
     <p:sldMasterId id="2147483648" r:id="rId4"/>
   </p:sldMasterIdLst>
@@ -276,7 +276,7 @@
       <p15:notesGuideLst xmlns:p15="http://schemas.microsoft.com/office/powerpoint/2012/main"/>
     </p:ext>
     <p:ext uri="http://customooxmlschemas.google.com/">
-      <go:slidesCustomData xmlns="" xmlns:go="http://customooxmlschemas.google.com/" xmlns:ahyp="http://schemas.microsoft.com/office/drawing/2018/hyperlinkcolor" xmlns:p15="http://schemas.microsoft.com/office/powerpoint/2012/main" xmlns:p14="http://schemas.microsoft.com/office/powerpoint/2010/main" xmlns:com="http://schemas.openxmlformats.org/drawingml/2006/compatibility" xmlns:pvml="urn:schemas-microsoft-com:office:powerpoint" xmlns:v="urn:schemas-microsoft-com:vml" xmlns:o="urn:schemas-microsoft-com:office:office" xmlns:dgm="http://schemas.openxmlformats.org/drawingml/2006/diagram" xmlns:c="http://schemas.openxmlformats.org/drawingml/2006/chart" xmlns:mv="urn:schemas-microsoft-com:mac:vml" xmlns:mc="http://schemas.openxmlformats.org/markup-compatibility/2006" r:id="rId59" roundtripDataSignature="AMtx7mh3YP3xexYcFoahXa2ehi0H5V4Zaw=="/>
+      <go:slidesCustomData xmlns:mc="http://schemas.openxmlformats.org/markup-compatibility/2006" xmlns:mv="urn:schemas-microsoft-com:mac:vml" xmlns:c="http://schemas.openxmlformats.org/drawingml/2006/chart" xmlns:dgm="http://schemas.openxmlformats.org/drawingml/2006/diagram" xmlns:o="urn:schemas-microsoft-com:office:office" xmlns:v="urn:schemas-microsoft-com:vml" xmlns:pvml="urn:schemas-microsoft-com:office:powerpoint" xmlns:com="http://schemas.openxmlformats.org/drawingml/2006/compatibility" xmlns:p14="http://schemas.microsoft.com/office/powerpoint/2010/main" xmlns:p15="http://schemas.microsoft.com/office/powerpoint/2012/main" xmlns:ahyp="http://schemas.microsoft.com/office/drawing/2018/hyperlinkcolor" xmlns:go="http://customooxmlschemas.google.com/" xmlns="" r:id="rId59" roundtripDataSignature="AMtx7mh3YP3xexYcFoahXa2ehi0H5V4Zaw=="/>
     </p:ext>
   </p:extLst>
 </p:presentation>
@@ -376,7 +376,7 @@
           <a:p>
             <a:fld id="{0CBFB8CE-488C-4A7E-87F2-3AF6127C51C1}" type="datetimeFigureOut">
               <a:rPr lang="en-IE" smtClean="0"/>
-              <a:t>22/09/2026</a:t>
+              <a:t>29/09/2026</a:t>
             </a:fld>
             <a:endParaRPr lang="en-IE"/>
           </a:p>
@@ -5466,7 +5466,7 @@
     <p:sldLayoutId id="2147483723" r:id="rId5"/>
     <p:sldLayoutId id="2147483728" r:id="rId6"/>
   </p:sldLayoutIdLst>
-  <p:hf sldNum="0" hdr="0" dt="0"/>
+  <p:hf hdr="0" dt="0"/>
   <p:txStyles>
     <p:titleStyle>
       <a:defPPr marR="0" lvl="0" algn="l" rtl="0">
@@ -6198,13 +6198,13 @@
           <a:lstStyle/>
           <a:p>
             <a:r>
-              <a:rPr lang="en-IE" dirty="0"/>
+              <a:rPr lang="en-GB" noProof="0" dirty="0"/>
               <a:t>ESTP Training</a:t>
             </a:r>
           </a:p>
           <a:p>
             <a:r>
-              <a:rPr lang="en-IE"/>
+              <a:rPr lang="en-GB" noProof="0" dirty="0"/>
               <a:t>05-07 October 2026</a:t>
             </a:r>
           </a:p>
@@ -6232,14 +6232,14 @@
           <a:lstStyle/>
           <a:p>
             <a:r>
-              <a:rPr lang="en-IE" dirty="0"/>
+              <a:rPr lang="en-GB" noProof="0" dirty="0"/>
               <a:t>JD+ on </a:t>
             </a:r>
             <a:r>
-              <a:rPr lang="en-IE" dirty="0" err="1"/>
+              <a:rPr lang="en-GB" noProof="0" dirty="0" err="1"/>
               <a:t>Github</a:t>
             </a:r>
-            <a:endParaRPr lang="en-IE" dirty="0"/>
+            <a:endParaRPr lang="en-GB" noProof="0" dirty="0"/>
           </a:p>
         </p:txBody>
       </p:sp>
@@ -6264,7 +6264,7 @@
           <a:bodyPr/>
           <a:lstStyle/>
           <a:p>
-            <a:endParaRPr lang="en-IE"/>
+            <a:endParaRPr lang="en-GB" noProof="0" dirty="0"/>
           </a:p>
         </p:txBody>
       </p:sp>
@@ -6314,14 +6314,38 @@
           <a:lstStyle/>
           <a:p>
             <a:r>
-              <a:rPr lang="fr-BE" dirty="0"/>
-              <a:t>Final </a:t>
-            </a:r>
-            <a:r>
-              <a:rPr lang="fr-BE" dirty="0" err="1"/>
-              <a:t>remarks</a:t>
-            </a:r>
-            <a:endParaRPr lang="en-US" dirty="0"/>
+              <a:rPr lang="en-GB" noProof="0" dirty="0"/>
+              <a:t>Final remarks</a:t>
+            </a:r>
+          </a:p>
+        </p:txBody>
+      </p:sp>
+      <p:sp>
+        <p:nvSpPr>
+          <p:cNvPr id="4" name="Espace réservé du numéro de diapositive 3">
+            <a:extLst>
+              <a:ext uri="{FF2B5EF4-FFF2-40B4-BE49-F238E27FC236}">
+                <a16:creationId xmlns:a16="http://schemas.microsoft.com/office/drawing/2014/main" id="{DC765F8A-ABC3-5A1A-9833-A7EEB0D0FD76}"/>
+              </a:ext>
+            </a:extLst>
+          </p:cNvPr>
+          <p:cNvSpPr>
+            <a:spLocks noGrp="1"/>
+          </p:cNvSpPr>
+          <p:nvPr>
+            <p:ph type="sldNum" idx="12"/>
+          </p:nvPr>
+        </p:nvSpPr>
+        <p:spPr/>
+        <p:txBody>
+          <a:bodyPr/>
+          <a:lstStyle/>
+          <a:p>
+            <a:fld id="{CDC1ED17-DE62-4D43-9CDA-4A6C9B2745D4}" type="slidenum">
+              <a:rPr lang="en-GB" noProof="0" smtClean="0"/>
+              <a:t>10</a:t>
+            </a:fld>
+            <a:endParaRPr lang="en-GB" noProof="0" dirty="0"/>
           </a:p>
         </p:txBody>
       </p:sp>
@@ -6332,7 +6356,7 @@
             <a:spLocks noGrp="1"/>
           </p:cNvSpPr>
           <p:nvPr>
-            <p:ph idx="1"/>
+            <p:ph sz="half" idx="2"/>
           </p:nvPr>
         </p:nvSpPr>
         <p:spPr/>
@@ -6341,177 +6365,93 @@
           <a:lstStyle/>
           <a:p>
             <a:r>
-              <a:rPr lang="fr-BE" dirty="0" err="1"/>
-              <a:t>Powerful</a:t>
-            </a:r>
-            <a:r>
-              <a:rPr lang="fr-BE" dirty="0"/>
+              <a:rPr lang="en-GB" noProof="0" dirty="0"/>
+              <a:t>Powerful tool</a:t>
+            </a:r>
+          </a:p>
+          <a:p>
+            <a:pPr lvl="1"/>
+            <a:r>
+              <a:rPr lang="en-GB" noProof="0" dirty="0"/>
+              <a:t>For distributed revision control</a:t>
+            </a:r>
+          </a:p>
+          <a:p>
+            <a:pPr lvl="1"/>
+            <a:r>
+              <a:rPr lang="en-GB" noProof="0" dirty="0"/>
+              <a:t>For collaborative development</a:t>
+            </a:r>
+          </a:p>
+          <a:p>
+            <a:r>
+              <a:rPr lang="en-GB" noProof="0" dirty="0"/>
+              <a:t>Mainly designed for developers!</a:t>
+            </a:r>
+          </a:p>
+          <a:p>
+            <a:pPr lvl="1"/>
+            <a:r>
+              <a:rPr lang="en-GB" noProof="0" dirty="0"/>
+              <a:t>Complex tool (git)</a:t>
+            </a:r>
+          </a:p>
+          <a:p>
+            <a:pPr lvl="1"/>
+            <a:r>
+              <a:rPr lang="en-GB" noProof="0" dirty="0"/>
+              <a:t>Focus on code</a:t>
+            </a:r>
+          </a:p>
+          <a:p>
+            <a:r>
+              <a:rPr lang="en-GB" noProof="0" dirty="0"/>
+              <a:t>Wiki, issue tracking and follow up </a:t>
+            </a:r>
+          </a:p>
+          <a:p>
+            <a:pPr lvl="1"/>
+            <a:r>
+              <a:rPr lang="en-GB" noProof="0" dirty="0"/>
+              <a:t>You could (should) contribute.</a:t>
+            </a:r>
+          </a:p>
+          <a:p>
+            <a:endParaRPr lang="en-GB" dirty="0"/>
+          </a:p>
+          <a:p>
+            <a:r>
+              <a:rPr lang="en-GB" dirty="0"/>
+              <a:t>Migration to </a:t>
+            </a:r>
+            <a:r>
+              <a:rPr lang="en-GB" dirty="0" err="1"/>
+              <a:t>gitlab</a:t>
+            </a:r>
+            <a:r>
+              <a:rPr lang="en-GB" dirty="0"/>
+              <a:t> in the future ???</a:t>
+            </a:r>
+            <a:endParaRPr lang="en-GB" noProof="0" dirty="0"/>
+          </a:p>
+          <a:p>
+            <a:endParaRPr lang="en-GB" noProof="0" dirty="0"/>
+          </a:p>
+          <a:p>
+            <a:pPr marL="631825" lvl="1" indent="0">
+              <a:buNone/>
+            </a:pPr>
+            <a:r>
+              <a:rPr lang="en-GB" noProof="0" dirty="0"/>
               <a:t> </a:t>
             </a:r>
-            <a:r>
-              <a:rPr lang="fr-BE" dirty="0" err="1"/>
-              <a:t>tool</a:t>
-            </a:r>
-            <a:endParaRPr lang="fr-BE" dirty="0"/>
           </a:p>
           <a:p>
             <a:pPr lvl="1"/>
-            <a:r>
-              <a:rPr lang="fr-BE" dirty="0"/>
-              <a:t>For </a:t>
-            </a:r>
-            <a:r>
-              <a:rPr lang="fr-BE" dirty="0" err="1"/>
-              <a:t>distributed</a:t>
-            </a:r>
-            <a:r>
-              <a:rPr lang="fr-BE" dirty="0"/>
-              <a:t> </a:t>
-            </a:r>
-            <a:r>
-              <a:rPr lang="fr-BE" dirty="0" err="1"/>
-              <a:t>revision</a:t>
-            </a:r>
-            <a:r>
-              <a:rPr lang="fr-BE" dirty="0"/>
-              <a:t> control</a:t>
-            </a:r>
-          </a:p>
-          <a:p>
-            <a:pPr lvl="1"/>
-            <a:r>
-              <a:rPr lang="fr-BE" dirty="0"/>
-              <a:t>For collaborative </a:t>
-            </a:r>
-            <a:r>
-              <a:rPr lang="fr-BE" dirty="0" err="1"/>
-              <a:t>development</a:t>
-            </a:r>
-            <a:endParaRPr lang="fr-BE" dirty="0"/>
-          </a:p>
-          <a:p>
-            <a:r>
-              <a:rPr lang="fr-BE" dirty="0" err="1"/>
-              <a:t>Mainly</a:t>
-            </a:r>
-            <a:r>
-              <a:rPr lang="fr-BE" dirty="0"/>
-              <a:t> </a:t>
-            </a:r>
-            <a:r>
-              <a:rPr lang="fr-BE" dirty="0" err="1"/>
-              <a:t>designed</a:t>
-            </a:r>
-            <a:r>
-              <a:rPr lang="fr-BE" dirty="0"/>
-              <a:t> for </a:t>
-            </a:r>
-            <a:r>
-              <a:rPr lang="fr-BE" dirty="0" err="1"/>
-              <a:t>developers</a:t>
-            </a:r>
-            <a:r>
-              <a:rPr lang="fr-BE" dirty="0"/>
-              <a:t>!</a:t>
-            </a:r>
-          </a:p>
-          <a:p>
-            <a:pPr lvl="1"/>
-            <a:r>
-              <a:rPr lang="fr-BE" dirty="0" err="1"/>
-              <a:t>Complex</a:t>
-            </a:r>
-            <a:r>
-              <a:rPr lang="fr-BE" dirty="0"/>
-              <a:t> </a:t>
-            </a:r>
-            <a:r>
-              <a:rPr lang="fr-BE" dirty="0" err="1"/>
-              <a:t>tool</a:t>
-            </a:r>
-            <a:r>
-              <a:rPr lang="fr-BE" dirty="0"/>
-              <a:t> (git)</a:t>
-            </a:r>
-          </a:p>
-          <a:p>
-            <a:pPr lvl="1"/>
-            <a:r>
-              <a:rPr lang="fr-BE" dirty="0"/>
-              <a:t>Focus on code</a:t>
-            </a:r>
-          </a:p>
-          <a:p>
-            <a:r>
-              <a:rPr lang="fr-BE" dirty="0"/>
-              <a:t>Wiki, issue </a:t>
-            </a:r>
-            <a:r>
-              <a:rPr lang="fr-BE" dirty="0" err="1"/>
-              <a:t>tracking</a:t>
-            </a:r>
-            <a:r>
-              <a:rPr lang="fr-BE" dirty="0"/>
-              <a:t> and </a:t>
-            </a:r>
-            <a:r>
-              <a:rPr lang="fr-BE" dirty="0" err="1"/>
-              <a:t>follow</a:t>
-            </a:r>
-            <a:r>
-              <a:rPr lang="fr-BE" dirty="0"/>
-              <a:t> up </a:t>
-            </a:r>
-          </a:p>
-          <a:p>
-            <a:pPr lvl="1"/>
-            <a:r>
-              <a:rPr lang="fr-BE" dirty="0"/>
-              <a:t>You </a:t>
-            </a:r>
-            <a:r>
-              <a:rPr lang="fr-BE" dirty="0" err="1"/>
-              <a:t>could</a:t>
-            </a:r>
-            <a:r>
-              <a:rPr lang="fr-BE" dirty="0"/>
-              <a:t> (</a:t>
-            </a:r>
-            <a:r>
-              <a:rPr lang="fr-BE" dirty="0" err="1"/>
-              <a:t>should</a:t>
-            </a:r>
-            <a:r>
-              <a:rPr lang="fr-BE" dirty="0"/>
-              <a:t>) </a:t>
-            </a:r>
-            <a:r>
-              <a:rPr lang="fr-BE" dirty="0" err="1"/>
-              <a:t>contribute</a:t>
-            </a:r>
-            <a:r>
-              <a:rPr lang="fr-BE" dirty="0"/>
-              <a:t>.</a:t>
-            </a:r>
-          </a:p>
-          <a:p>
-            <a:endParaRPr lang="fr-BE" dirty="0"/>
-          </a:p>
-          <a:p>
-            <a:pPr marL="631825" lvl="1" indent="0">
-              <a:buNone/>
-            </a:pPr>
-            <a:r>
-              <a:rPr lang="fr-BE" dirty="0"/>
-              <a:t> </a:t>
-            </a:r>
-          </a:p>
-          <a:p>
-            <a:pPr lvl="1"/>
-            <a:endParaRPr lang="fr-BE" dirty="0"/>
-          </a:p>
-          <a:p>
-            <a:endParaRPr lang="en-US" dirty="0"/>
+            <a:endParaRPr lang="en-GB" noProof="0" dirty="0"/>
+          </a:p>
+          <a:p>
+            <a:endParaRPr lang="en-GB" noProof="0" dirty="0"/>
           </a:p>
         </p:txBody>
       </p:sp>
@@ -6528,19 +6468,28 @@
             <a:spLocks noGrp="1"/>
           </p:cNvSpPr>
           <p:nvPr>
-            <p:ph type="ftr" sz="quarter" idx="11"/>
+            <p:ph type="ftr" sz="quarter" idx="4294967295"/>
           </p:nvPr>
         </p:nvSpPr>
-        <p:spPr/>
+        <p:spPr>
+          <a:xfrm>
+            <a:off x="0" y="0"/>
+            <a:ext cx="0" cy="0"/>
+          </a:xfrm>
+        </p:spPr>
         <p:txBody>
           <a:bodyPr/>
           <a:lstStyle/>
           <a:p>
             <a:r>
-              <a:rPr lang="en-US"/>
-              <a:t>JD+ on Github</a:t>
-            </a:r>
-            <a:endParaRPr lang="en-GB"/>
+              <a:rPr lang="en-GB" noProof="0" dirty="0"/>
+              <a:t>JD+ on </a:t>
+            </a:r>
+            <a:r>
+              <a:rPr lang="en-GB" noProof="0" dirty="0" err="1"/>
+              <a:t>Github</a:t>
+            </a:r>
+            <a:endParaRPr lang="en-GB" noProof="0" dirty="0"/>
           </a:p>
         </p:txBody>
       </p:sp>
@@ -6595,7 +6544,7 @@
           <a:bodyPr/>
           <a:lstStyle/>
           <a:p>
-            <a:endParaRPr lang="en-IE"/>
+            <a:endParaRPr lang="en-GB" noProof="0" dirty="0"/>
           </a:p>
         </p:txBody>
       </p:sp>
@@ -6620,7 +6569,37 @@
           <a:bodyPr/>
           <a:lstStyle/>
           <a:p>
-            <a:endParaRPr lang="en-IE"/>
+            <a:endParaRPr lang="en-GB" noProof="0" dirty="0"/>
+          </a:p>
+        </p:txBody>
+      </p:sp>
+      <p:sp>
+        <p:nvSpPr>
+          <p:cNvPr id="4" name="Espace réservé du numéro de diapositive 3">
+            <a:extLst>
+              <a:ext uri="{FF2B5EF4-FFF2-40B4-BE49-F238E27FC236}">
+                <a16:creationId xmlns:a16="http://schemas.microsoft.com/office/drawing/2014/main" id="{E860B00A-214B-3CAB-E515-56594F58818E}"/>
+              </a:ext>
+            </a:extLst>
+          </p:cNvPr>
+          <p:cNvSpPr>
+            <a:spLocks noGrp="1"/>
+          </p:cNvSpPr>
+          <p:nvPr>
+            <p:ph type="sldNum" idx="12"/>
+          </p:nvPr>
+        </p:nvSpPr>
+        <p:spPr/>
+        <p:txBody>
+          <a:bodyPr/>
+          <a:lstStyle/>
+          <a:p>
+            <a:fld id="{00000000-1234-1234-1234-123412341234}" type="slidenum">
+              <a:rPr lang="en-GB" noProof="0" smtClean="0"/>
+              <a:pPr/>
+              <a:t>11</a:t>
+            </a:fld>
+            <a:endParaRPr lang="en-GB" noProof="0" dirty="0"/>
           </a:p>
         </p:txBody>
       </p:sp>
@@ -6728,12 +6707,7 @@
             <p:ph type="title"/>
           </p:nvPr>
         </p:nvSpPr>
-        <p:spPr>
-          <a:xfrm>
-            <a:off x="1981200" y="4077072"/>
-            <a:ext cx="8229600" cy="1143000"/>
-          </a:xfrm>
-        </p:spPr>
+        <p:spPr/>
         <p:txBody>
           <a:bodyPr>
             <a:normAutofit/>
@@ -6741,7 +6715,7 @@
           <a:lstStyle/>
           <a:p>
             <a:r>
-              <a:rPr lang="fr-BE" dirty="0">
+              <a:rPr lang="en-GB" noProof="0" dirty="0">
                 <a:solidFill>
                   <a:schemeClr val="tx2"/>
                 </a:solidFill>
@@ -6752,7 +6726,7 @@
               <a:t>https://</a:t>
             </a:r>
             <a:r>
-              <a:rPr lang="fr-BE" b="1" dirty="0">
+              <a:rPr lang="en-GB" b="1" noProof="0" dirty="0">
                 <a:solidFill>
                   <a:schemeClr val="tx2"/>
                 </a:solidFill>
@@ -6763,7 +6737,7 @@
               <a:t>github</a:t>
             </a:r>
             <a:r>
-              <a:rPr lang="fr-BE" dirty="0">
+              <a:rPr lang="en-GB" noProof="0" dirty="0">
                 <a:solidFill>
                   <a:schemeClr val="tx2"/>
                 </a:solidFill>
@@ -6773,13 +6747,42 @@
               </a:rPr>
               <a:t>.com/jdemetra/</a:t>
             </a:r>
-            <a:endParaRPr lang="en-US" b="1" dirty="0">
+            <a:endParaRPr lang="en-GB" b="1" noProof="0" dirty="0">
               <a:solidFill>
                 <a:schemeClr val="tx2"/>
               </a:solidFill>
               <a:latin typeface="Consolas" panose="020B0609020204030204" pitchFamily="49" charset="0"/>
               <a:cs typeface="Consolas" panose="020B0609020204030204" pitchFamily="49" charset="0"/>
             </a:endParaRPr>
+          </a:p>
+        </p:txBody>
+      </p:sp>
+      <p:sp>
+        <p:nvSpPr>
+          <p:cNvPr id="2" name="Espace réservé du numéro de diapositive 1">
+            <a:extLst>
+              <a:ext uri="{FF2B5EF4-FFF2-40B4-BE49-F238E27FC236}">
+                <a16:creationId xmlns:a16="http://schemas.microsoft.com/office/drawing/2014/main" id="{A65EFF9A-833A-C81D-90CB-1D6BA559B04E}"/>
+              </a:ext>
+            </a:extLst>
+          </p:cNvPr>
+          <p:cNvSpPr>
+            <a:spLocks noGrp="1"/>
+          </p:cNvSpPr>
+          <p:nvPr>
+            <p:ph type="sldNum" idx="12"/>
+          </p:nvPr>
+        </p:nvSpPr>
+        <p:spPr/>
+        <p:txBody>
+          <a:bodyPr/>
+          <a:lstStyle/>
+          <a:p>
+            <a:fld id="{CDC1ED17-DE62-4D43-9CDA-4A6C9B2745D4}" type="slidenum">
+              <a:rPr lang="en-GB" noProof="0" smtClean="0"/>
+              <a:t>2</a:t>
+            </a:fld>
+            <a:endParaRPr lang="en-GB" noProof="0" dirty="0"/>
           </a:p>
         </p:txBody>
       </p:sp>
@@ -6796,19 +6799,28 @@
             <a:spLocks noGrp="1"/>
           </p:cNvSpPr>
           <p:nvPr>
-            <p:ph type="ftr" sz="quarter" idx="11"/>
+            <p:ph type="ftr" sz="quarter" idx="4294967295"/>
           </p:nvPr>
         </p:nvSpPr>
-        <p:spPr/>
+        <p:spPr>
+          <a:xfrm>
+            <a:off x="0" y="0"/>
+            <a:ext cx="0" cy="0"/>
+          </a:xfrm>
+        </p:spPr>
         <p:txBody>
           <a:bodyPr/>
           <a:lstStyle/>
           <a:p>
             <a:r>
-              <a:rPr lang="en-US"/>
-              <a:t>JD+ on Github</a:t>
-            </a:r>
-            <a:endParaRPr lang="en-GB"/>
+              <a:rPr lang="en-GB" noProof="0" dirty="0"/>
+              <a:t>JD+ on </a:t>
+            </a:r>
+            <a:r>
+              <a:rPr lang="en-GB" noProof="0" dirty="0" err="1"/>
+              <a:t>Github</a:t>
+            </a:r>
+            <a:endParaRPr lang="en-GB" noProof="0" dirty="0"/>
           </a:p>
         </p:txBody>
       </p:sp>
@@ -6852,38 +6864,23 @@
             <p:ph type="title"/>
           </p:nvPr>
         </p:nvSpPr>
-        <p:spPr>
-          <a:xfrm>
-            <a:off x="1981200" y="274638"/>
-            <a:ext cx="8229600" cy="1143000"/>
-          </a:xfrm>
-        </p:spPr>
+        <p:spPr/>
         <p:txBody>
           <a:bodyPr/>
           <a:lstStyle/>
           <a:p>
             <a:r>
-              <a:rPr lang="fr-BE" dirty="0" err="1">
+              <a:rPr lang="en-GB" noProof="0" dirty="0">
                 <a:solidFill>
                   <a:schemeClr val="tx2"/>
                 </a:solidFill>
                 <a:latin typeface="Consolas" panose="020B0609020204030204" pitchFamily="49" charset="0"/>
                 <a:cs typeface="Consolas" panose="020B0609020204030204" pitchFamily="49" charset="0"/>
               </a:rPr>
-              <a:t>GitHub</a:t>
-            </a:r>
-            <a:r>
-              <a:rPr lang="fr-BE" dirty="0">
-                <a:solidFill>
-                  <a:schemeClr val="tx2"/>
-                </a:solidFill>
-                <a:latin typeface="Consolas" panose="020B0609020204030204" pitchFamily="49" charset="0"/>
-                <a:cs typeface="Consolas" panose="020B0609020204030204" pitchFamily="49" charset="0"/>
-              </a:rPr>
-              <a:t> </a:t>
-            </a:r>
-            <a:r>
-              <a:rPr lang="en-US" b="1" dirty="0">
+              <a:t>GitHub </a:t>
+            </a:r>
+            <a:r>
+              <a:rPr lang="en-GB" b="1" noProof="0" dirty="0">
                 <a:solidFill>
                   <a:schemeClr val="tx2"/>
                 </a:solidFill>
@@ -6892,6 +6889,35 @@
               </a:rPr>
               <a:t>specifics</a:t>
             </a:r>
+          </a:p>
+        </p:txBody>
+      </p:sp>
+      <p:sp>
+        <p:nvSpPr>
+          <p:cNvPr id="2" name="Espace réservé du numéro de diapositive 1">
+            <a:extLst>
+              <a:ext uri="{FF2B5EF4-FFF2-40B4-BE49-F238E27FC236}">
+                <a16:creationId xmlns:a16="http://schemas.microsoft.com/office/drawing/2014/main" id="{1FF698FE-58A6-4EAD-1FE0-CBA484EC04AA}"/>
+              </a:ext>
+            </a:extLst>
+          </p:cNvPr>
+          <p:cNvSpPr>
+            <a:spLocks noGrp="1"/>
+          </p:cNvSpPr>
+          <p:nvPr>
+            <p:ph type="sldNum" idx="12"/>
+          </p:nvPr>
+        </p:nvSpPr>
+        <p:spPr/>
+        <p:txBody>
+          <a:bodyPr/>
+          <a:lstStyle/>
+          <a:p>
+            <a:fld id="{CDC1ED17-DE62-4D43-9CDA-4A6C9B2745D4}" type="slidenum">
+              <a:rPr lang="en-GB" noProof="0" smtClean="0"/>
+              <a:t>3</a:t>
+            </a:fld>
+            <a:endParaRPr lang="en-GB" noProof="0" dirty="0"/>
           </a:p>
         </p:txBody>
       </p:sp>
@@ -6902,15 +6928,10 @@
             <a:spLocks noGrp="1"/>
           </p:cNvSpPr>
           <p:nvPr>
-            <p:ph idx="1"/>
+            <p:ph sz="half" idx="2"/>
           </p:nvPr>
         </p:nvSpPr>
-        <p:spPr>
-          <a:xfrm>
-            <a:off x="1981200" y="1600201"/>
-            <a:ext cx="8229600" cy="4525963"/>
-          </a:xfrm>
-        </p:spPr>
+        <p:spPr/>
         <p:txBody>
           <a:bodyPr/>
           <a:lstStyle/>
@@ -6921,7 +6942,7 @@
               </a:lnSpc>
             </a:pPr>
             <a:r>
-              <a:rPr lang="en-US" b="1" dirty="0" err="1">
+              <a:rPr lang="en-GB" b="1" noProof="0" dirty="0">
                 <a:solidFill>
                   <a:schemeClr val="tx1">
                     <a:lumMod val="85000"/>
@@ -6934,7 +6955,7 @@
               <a:t>git</a:t>
             </a:r>
             <a:r>
-              <a:rPr lang="en-US" dirty="0">
+              <a:rPr lang="en-GB" noProof="0" dirty="0">
                 <a:solidFill>
                   <a:schemeClr val="tx1">
                     <a:lumMod val="85000"/>
@@ -6954,7 +6975,7 @@
               </a:lnSpc>
             </a:pPr>
             <a:r>
-              <a:rPr lang="en-US" dirty="0">
+              <a:rPr lang="en-GB" noProof="0" dirty="0">
                 <a:solidFill>
                   <a:schemeClr val="tx1">
                     <a:lumMod val="85000"/>
@@ -6974,7 +6995,7 @@
               </a:lnSpc>
             </a:pPr>
             <a:r>
-              <a:rPr lang="en-US" dirty="0">
+              <a:rPr lang="en-GB" noProof="0" dirty="0">
                 <a:solidFill>
                   <a:schemeClr val="tx1">
                     <a:lumMod val="85000"/>
@@ -6994,7 +7015,7 @@
               </a:lnSpc>
             </a:pPr>
             <a:r>
-              <a:rPr lang="en-US" dirty="0">
+              <a:rPr lang="en-GB" noProof="0" dirty="0">
                 <a:solidFill>
                   <a:schemeClr val="tx1">
                     <a:lumMod val="85000"/>
@@ -7014,7 +7035,7 @@
               </a:lnSpc>
             </a:pPr>
             <a:r>
-              <a:rPr lang="fr-BE" dirty="0">
+              <a:rPr lang="en-GB" noProof="0" dirty="0">
                 <a:solidFill>
                   <a:schemeClr val="tx1">
                     <a:lumMod val="85000"/>
@@ -7026,16 +7047,6 @@
               </a:rPr>
               <a:t>Wiki</a:t>
             </a:r>
-            <a:endParaRPr lang="en-US" dirty="0">
-              <a:solidFill>
-                <a:schemeClr val="tx1">
-                  <a:lumMod val="85000"/>
-                  <a:lumOff val="15000"/>
-                </a:schemeClr>
-              </a:solidFill>
-              <a:latin typeface="Consolas" panose="020B0609020204030204" pitchFamily="49" charset="0"/>
-              <a:cs typeface="Consolas" panose="020B0609020204030204" pitchFamily="49" charset="0"/>
-            </a:endParaRPr>
           </a:p>
         </p:txBody>
       </p:sp>
@@ -7052,19 +7063,28 @@
             <a:spLocks noGrp="1"/>
           </p:cNvSpPr>
           <p:nvPr>
-            <p:ph type="ftr" sz="quarter" idx="11"/>
+            <p:ph type="ftr" sz="quarter" idx="4294967295"/>
           </p:nvPr>
         </p:nvSpPr>
-        <p:spPr/>
+        <p:spPr>
+          <a:xfrm>
+            <a:off x="0" y="0"/>
+            <a:ext cx="0" cy="0"/>
+          </a:xfrm>
+        </p:spPr>
         <p:txBody>
           <a:bodyPr/>
           <a:lstStyle/>
           <a:p>
             <a:r>
-              <a:rPr lang="en-US"/>
-              <a:t>JD+ on Github</a:t>
-            </a:r>
-            <a:endParaRPr lang="en-GB"/>
+              <a:rPr lang="en-GB" noProof="0" dirty="0"/>
+              <a:t>JD+ on </a:t>
+            </a:r>
+            <a:r>
+              <a:rPr lang="en-GB" noProof="0" dirty="0" err="1"/>
+              <a:t>Github</a:t>
+            </a:r>
+            <a:endParaRPr lang="en-GB" noProof="0" dirty="0"/>
           </a:p>
         </p:txBody>
       </p:sp>
@@ -7114,7 +7134,7 @@
           <a:lstStyle/>
           <a:p>
             <a:r>
-              <a:rPr lang="en-US" dirty="0" err="1">
+              <a:rPr lang="en-GB" noProof="0" dirty="0">
                 <a:solidFill>
                   <a:schemeClr val="tx1">
                     <a:lumMod val="85000"/>
@@ -7124,10 +7144,10 @@
                 <a:latin typeface="Consolas" panose="020B0609020204030204" pitchFamily="49" charset="0"/>
                 <a:cs typeface="Consolas" panose="020B0609020204030204" pitchFamily="49" charset="0"/>
               </a:rPr>
-              <a:t>git</a:t>
-            </a:r>
-            <a:r>
-              <a:rPr lang="en-US" dirty="0">
+              <a:t>git web-based hosting</a:t>
+            </a:r>
+            <a:br>
+              <a:rPr lang="en-GB" noProof="0" dirty="0">
                 <a:solidFill>
                   <a:schemeClr val="tx1">
                     <a:lumMod val="85000"/>
@@ -7137,21 +7157,37 @@
                 <a:latin typeface="Consolas" panose="020B0609020204030204" pitchFamily="49" charset="0"/>
                 <a:cs typeface="Consolas" panose="020B0609020204030204" pitchFamily="49" charset="0"/>
               </a:rPr>
-              <a:t> web-based hosting</a:t>
-            </a:r>
-            <a:br>
-              <a:rPr lang="en-US" dirty="0">
-                <a:solidFill>
-                  <a:schemeClr val="tx1">
-                    <a:lumMod val="85000"/>
-                    <a:lumOff val="15000"/>
-                  </a:schemeClr>
-                </a:solidFill>
-                <a:latin typeface="Consolas" panose="020B0609020204030204" pitchFamily="49" charset="0"/>
-                <a:cs typeface="Consolas" panose="020B0609020204030204" pitchFamily="49" charset="0"/>
-              </a:rPr>
             </a:br>
-            <a:endParaRPr lang="en-US" dirty="0"/>
+            <a:endParaRPr lang="en-GB" noProof="0" dirty="0"/>
+          </a:p>
+        </p:txBody>
+      </p:sp>
+      <p:sp>
+        <p:nvSpPr>
+          <p:cNvPr id="4" name="Espace réservé du numéro de diapositive 3">
+            <a:extLst>
+              <a:ext uri="{FF2B5EF4-FFF2-40B4-BE49-F238E27FC236}">
+                <a16:creationId xmlns:a16="http://schemas.microsoft.com/office/drawing/2014/main" id="{E7B67AAC-5A0D-44E4-8440-F25FC0205663}"/>
+              </a:ext>
+            </a:extLst>
+          </p:cNvPr>
+          <p:cNvSpPr>
+            <a:spLocks noGrp="1"/>
+          </p:cNvSpPr>
+          <p:nvPr>
+            <p:ph type="sldNum" idx="12"/>
+          </p:nvPr>
+        </p:nvSpPr>
+        <p:spPr/>
+        <p:txBody>
+          <a:bodyPr/>
+          <a:lstStyle/>
+          <a:p>
+            <a:fld id="{CDC1ED17-DE62-4D43-9CDA-4A6C9B2745D4}" type="slidenum">
+              <a:rPr lang="en-GB" noProof="0" smtClean="0"/>
+              <a:t>4</a:t>
+            </a:fld>
+            <a:endParaRPr lang="en-GB" noProof="0" dirty="0"/>
           </a:p>
         </p:txBody>
       </p:sp>
@@ -7162,7 +7198,7 @@
             <a:spLocks noGrp="1"/>
           </p:cNvSpPr>
           <p:nvPr>
-            <p:ph idx="1"/>
+            <p:ph sz="half" idx="2"/>
           </p:nvPr>
         </p:nvSpPr>
         <p:spPr/>
@@ -7171,23 +7207,61 @@
           <a:lstStyle/>
           <a:p>
             <a:r>
-              <a:rPr lang="en-US" b="1" dirty="0" err="1"/>
+              <a:rPr lang="en-GB" b="1" noProof="0" dirty="0"/>
               <a:t>Git</a:t>
             </a:r>
             <a:r>
-              <a:rPr lang="en-US" dirty="0"/>
+              <a:rPr lang="en-GB" noProof="0" dirty="0"/>
               <a:t> is a </a:t>
             </a:r>
             <a:r>
-              <a:rPr lang="en-US" dirty="0">
+              <a:rPr lang="en-GB" noProof="0" dirty="0">
                 <a:hlinkClick r:id="rId2" tooltip="Distributed revision control"/>
               </a:rPr>
               <a:t>distributed revision control</a:t>
             </a:r>
             <a:r>
-              <a:rPr lang="en-US" dirty="0"/>
+              <a:rPr lang="en-GB" noProof="0" dirty="0"/>
               <a:t> system with an emphasis on speed, data integrity, and support for distributed, non-linear workflows. [Wikipedia]</a:t>
             </a:r>
+          </a:p>
+        </p:txBody>
+      </p:sp>
+      <p:sp>
+        <p:nvSpPr>
+          <p:cNvPr id="5" name="Espace réservé du pied de page 4">
+            <a:extLst>
+              <a:ext uri="{FF2B5EF4-FFF2-40B4-BE49-F238E27FC236}">
+                <a16:creationId xmlns:a16="http://schemas.microsoft.com/office/drawing/2014/main" id="{33C794FA-3D98-4584-948F-F1EFFBD3FB54}"/>
+              </a:ext>
+            </a:extLst>
+          </p:cNvPr>
+          <p:cNvSpPr>
+            <a:spLocks noGrp="1"/>
+          </p:cNvSpPr>
+          <p:nvPr>
+            <p:ph type="ftr" sz="quarter" idx="4294967295"/>
+          </p:nvPr>
+        </p:nvSpPr>
+        <p:spPr>
+          <a:xfrm>
+            <a:off x="0" y="0"/>
+            <a:ext cx="0" cy="0"/>
+          </a:xfrm>
+        </p:spPr>
+        <p:txBody>
+          <a:bodyPr/>
+          <a:lstStyle/>
+          <a:p>
+            <a:r>
+              <a:rPr lang="en-GB" noProof="0" dirty="0"/>
+              <a:t>JD+ on </a:t>
+            </a:r>
+            <a:r>
+              <a:rPr lang="en-GB" noProof="0" dirty="0" err="1"/>
+              <a:t>Github</a:t>
+            </a:r>
+            <a:endParaRPr lang="en-GB" noProof="0" dirty="0"/>
           </a:p>
         </p:txBody>
       </p:sp>
@@ -7245,35 +7319,6 @@
           </a:extLst>
         </p:spPr>
       </p:pic>
-      <p:sp>
-        <p:nvSpPr>
-          <p:cNvPr id="5" name="Espace réservé du pied de page 4">
-            <a:extLst>
-              <a:ext uri="{FF2B5EF4-FFF2-40B4-BE49-F238E27FC236}">
-                <a16:creationId xmlns:a16="http://schemas.microsoft.com/office/drawing/2014/main" id="{33C794FA-3D98-4584-948F-F1EFFBD3FB54}"/>
-              </a:ext>
-            </a:extLst>
-          </p:cNvPr>
-          <p:cNvSpPr>
-            <a:spLocks noGrp="1"/>
-          </p:cNvSpPr>
-          <p:nvPr>
-            <p:ph type="ftr" sz="quarter" idx="11"/>
-          </p:nvPr>
-        </p:nvSpPr>
-        <p:spPr/>
-        <p:txBody>
-          <a:bodyPr/>
-          <a:lstStyle/>
-          <a:p>
-            <a:r>
-              <a:rPr lang="en-US"/>
-              <a:t>JD+ on Github</a:t>
-            </a:r>
-            <a:endParaRPr lang="en-GB"/>
-          </a:p>
-        </p:txBody>
-      </p:sp>
     </p:spTree>
     <p:extLst>
       <p:ext uri="{BB962C8B-B14F-4D97-AF65-F5344CB8AC3E}">
@@ -7320,7 +7365,7 @@
           <a:lstStyle/>
           <a:p>
             <a:r>
-              <a:rPr lang="en-US" dirty="0">
+              <a:rPr lang="en-GB" noProof="0" dirty="0">
                 <a:solidFill>
                   <a:schemeClr val="tx1">
                     <a:lumMod val="85000"/>
@@ -7332,7 +7377,36 @@
               </a:rPr>
               <a:t>« Social coding »</a:t>
             </a:r>
-            <a:endParaRPr lang="en-US" dirty="0"/>
+            <a:endParaRPr lang="en-GB" noProof="0" dirty="0"/>
+          </a:p>
+        </p:txBody>
+      </p:sp>
+      <p:sp>
+        <p:nvSpPr>
+          <p:cNvPr id="3" name="Espace réservé du numéro de diapositive 2">
+            <a:extLst>
+              <a:ext uri="{FF2B5EF4-FFF2-40B4-BE49-F238E27FC236}">
+                <a16:creationId xmlns:a16="http://schemas.microsoft.com/office/drawing/2014/main" id="{B6CA8B80-C2C7-715B-3C4D-65025B40016C}"/>
+              </a:ext>
+            </a:extLst>
+          </p:cNvPr>
+          <p:cNvSpPr>
+            <a:spLocks noGrp="1"/>
+          </p:cNvSpPr>
+          <p:nvPr>
+            <p:ph type="sldNum" idx="12"/>
+          </p:nvPr>
+        </p:nvSpPr>
+        <p:spPr/>
+        <p:txBody>
+          <a:bodyPr/>
+          <a:lstStyle/>
+          <a:p>
+            <a:fld id="{CDC1ED17-DE62-4D43-9CDA-4A6C9B2745D4}" type="slidenum">
+              <a:rPr lang="en-GB" noProof="0" smtClean="0"/>
+              <a:t>5</a:t>
+            </a:fld>
+            <a:endParaRPr lang="en-GB" noProof="0" dirty="0"/>
           </a:p>
         </p:txBody>
       </p:sp>
@@ -7343,7 +7417,7 @@
             <a:picLocks noGrp="1" noChangeAspect="1" noChangeArrowheads="1"/>
           </p:cNvPicPr>
           <p:nvPr>
-            <p:ph idx="1"/>
+            <p:ph sz="half" idx="2"/>
           </p:nvPr>
         </p:nvPicPr>
         <p:blipFill>
@@ -7354,15 +7428,14 @@
               </a:ext>
             </a:extLst>
           </a:blip>
-          <a:srcRect/>
           <a:stretch>
             <a:fillRect/>
           </a:stretch>
         </p:blipFill>
         <p:spPr bwMode="auto">
           <a:xfrm>
-            <a:off x="1524000" y="3553905"/>
-            <a:ext cx="7591824" cy="2865368"/>
+            <a:off x="1300460" y="1901825"/>
+            <a:ext cx="9854606" cy="4194175"/>
           </a:xfrm>
           <a:prstGeom prst="rect">
             <a:avLst/>
@@ -7392,6 +7465,44 @@
           </a:extLst>
         </p:spPr>
       </p:pic>
+      <p:sp>
+        <p:nvSpPr>
+          <p:cNvPr id="4" name="Espace réservé du pied de page 3">
+            <a:extLst>
+              <a:ext uri="{FF2B5EF4-FFF2-40B4-BE49-F238E27FC236}">
+                <a16:creationId xmlns:a16="http://schemas.microsoft.com/office/drawing/2014/main" id="{FC98C44B-831F-3B9A-60CB-602114508D80}"/>
+              </a:ext>
+            </a:extLst>
+          </p:cNvPr>
+          <p:cNvSpPr>
+            <a:spLocks noGrp="1"/>
+          </p:cNvSpPr>
+          <p:nvPr>
+            <p:ph type="ftr" sz="quarter" idx="4294967295"/>
+          </p:nvPr>
+        </p:nvSpPr>
+        <p:spPr>
+          <a:xfrm>
+            <a:off x="0" y="0"/>
+            <a:ext cx="0" cy="0"/>
+          </a:xfrm>
+        </p:spPr>
+        <p:txBody>
+          <a:bodyPr/>
+          <a:lstStyle/>
+          <a:p>
+            <a:r>
+              <a:rPr lang="en-GB" noProof="0" dirty="0"/>
+              <a:t>JD+ on </a:t>
+            </a:r>
+            <a:r>
+              <a:rPr lang="en-GB" noProof="0" dirty="0" err="1"/>
+              <a:t>Github</a:t>
+            </a:r>
+            <a:endParaRPr lang="en-GB" noProof="0" dirty="0"/>
+          </a:p>
+        </p:txBody>
+      </p:sp>
       <p:pic>
         <p:nvPicPr>
           <p:cNvPr id="3075" name="Picture 3"/>
@@ -7446,35 +7557,6 @@
           </a:extLst>
         </p:spPr>
       </p:pic>
-      <p:sp>
-        <p:nvSpPr>
-          <p:cNvPr id="4" name="Espace réservé du pied de page 3">
-            <a:extLst>
-              <a:ext uri="{FF2B5EF4-FFF2-40B4-BE49-F238E27FC236}">
-                <a16:creationId xmlns:a16="http://schemas.microsoft.com/office/drawing/2014/main" id="{FC98C44B-831F-3B9A-60CB-602114508D80}"/>
-              </a:ext>
-            </a:extLst>
-          </p:cNvPr>
-          <p:cNvSpPr>
-            <a:spLocks noGrp="1"/>
-          </p:cNvSpPr>
-          <p:nvPr>
-            <p:ph type="ftr" sz="quarter" idx="11"/>
-          </p:nvPr>
-        </p:nvSpPr>
-        <p:spPr/>
-        <p:txBody>
-          <a:bodyPr/>
-          <a:lstStyle/>
-          <a:p>
-            <a:r>
-              <a:rPr lang="en-US"/>
-              <a:t>JD+ on Github</a:t>
-            </a:r>
-            <a:endParaRPr lang="en-GB"/>
-          </a:p>
-        </p:txBody>
-      </p:sp>
     </p:spTree>
     <p:extLst>
       <p:ext uri="{BB962C8B-B14F-4D97-AF65-F5344CB8AC3E}">
@@ -7521,7 +7603,7 @@
           <a:lstStyle/>
           <a:p>
             <a:r>
-              <a:rPr lang="en-US" dirty="0">
+              <a:rPr lang="en-GB" noProof="0" dirty="0">
                 <a:solidFill>
                   <a:schemeClr val="tx1">
                     <a:lumMod val="85000"/>
@@ -7533,18 +7615,24 @@
               </a:rPr>
               <a:t>Issue tracking</a:t>
             </a:r>
-            <a:endParaRPr lang="en-US" dirty="0"/>
+            <a:endParaRPr lang="en-GB" noProof="0" dirty="0"/>
           </a:p>
         </p:txBody>
       </p:sp>
       <p:sp>
         <p:nvSpPr>
-          <p:cNvPr id="4" name="Content Placeholder 3"/>
+          <p:cNvPr id="3" name="Espace réservé du numéro de diapositive 2">
+            <a:extLst>
+              <a:ext uri="{FF2B5EF4-FFF2-40B4-BE49-F238E27FC236}">
+                <a16:creationId xmlns:a16="http://schemas.microsoft.com/office/drawing/2014/main" id="{A25FD54B-60A3-A5CE-3F77-3A3A495BB949}"/>
+              </a:ext>
+            </a:extLst>
+          </p:cNvPr>
           <p:cNvSpPr>
             <a:spLocks noGrp="1"/>
           </p:cNvSpPr>
           <p:nvPr>
-            <p:ph idx="1"/>
+            <p:ph type="sldNum" idx="12"/>
           </p:nvPr>
         </p:nvSpPr>
         <p:spPr/>
@@ -7552,7 +7640,49 @@
           <a:bodyPr/>
           <a:lstStyle/>
           <a:p>
-            <a:endParaRPr lang="en-US" dirty="0"/>
+            <a:fld id="{CDC1ED17-DE62-4D43-9CDA-4A6C9B2745D4}" type="slidenum">
+              <a:rPr lang="en-GB" noProof="0" smtClean="0"/>
+              <a:t>6</a:t>
+            </a:fld>
+            <a:endParaRPr lang="en-GB" noProof="0" dirty="0"/>
+          </a:p>
+        </p:txBody>
+      </p:sp>
+      <p:sp>
+        <p:nvSpPr>
+          <p:cNvPr id="5" name="Espace réservé du pied de page 4">
+            <a:extLst>
+              <a:ext uri="{FF2B5EF4-FFF2-40B4-BE49-F238E27FC236}">
+                <a16:creationId xmlns:a16="http://schemas.microsoft.com/office/drawing/2014/main" id="{36FB1BBD-4E97-6C25-8AAF-690390DABFF2}"/>
+              </a:ext>
+            </a:extLst>
+          </p:cNvPr>
+          <p:cNvSpPr>
+            <a:spLocks noGrp="1"/>
+          </p:cNvSpPr>
+          <p:nvPr>
+            <p:ph type="ftr" sz="quarter" idx="4294967295"/>
+          </p:nvPr>
+        </p:nvSpPr>
+        <p:spPr>
+          <a:xfrm>
+            <a:off x="0" y="0"/>
+            <a:ext cx="0" cy="0"/>
+          </a:xfrm>
+        </p:spPr>
+        <p:txBody>
+          <a:bodyPr/>
+          <a:lstStyle/>
+          <a:p>
+            <a:r>
+              <a:rPr lang="en-GB" noProof="0" dirty="0"/>
+              <a:t>JD+ on </a:t>
+            </a:r>
+            <a:r>
+              <a:rPr lang="en-GB" noProof="0" dirty="0" err="1"/>
+              <a:t>Github</a:t>
+            </a:r>
+            <a:endParaRPr lang="en-GB" noProof="0" dirty="0"/>
           </a:p>
         </p:txBody>
       </p:sp>
@@ -7610,35 +7740,6 @@
           </a:extLst>
         </p:spPr>
       </p:pic>
-      <p:sp>
-        <p:nvSpPr>
-          <p:cNvPr id="5" name="Espace réservé du pied de page 4">
-            <a:extLst>
-              <a:ext uri="{FF2B5EF4-FFF2-40B4-BE49-F238E27FC236}">
-                <a16:creationId xmlns:a16="http://schemas.microsoft.com/office/drawing/2014/main" id="{36FB1BBD-4E97-6C25-8AAF-690390DABFF2}"/>
-              </a:ext>
-            </a:extLst>
-          </p:cNvPr>
-          <p:cNvSpPr>
-            <a:spLocks noGrp="1"/>
-          </p:cNvSpPr>
-          <p:nvPr>
-            <p:ph type="ftr" sz="quarter" idx="11"/>
-          </p:nvPr>
-        </p:nvSpPr>
-        <p:spPr/>
-        <p:txBody>
-          <a:bodyPr/>
-          <a:lstStyle/>
-          <a:p>
-            <a:r>
-              <a:rPr lang="en-US"/>
-              <a:t>JD+ on Github</a:t>
-            </a:r>
-            <a:endParaRPr lang="en-GB"/>
-          </a:p>
-        </p:txBody>
-      </p:sp>
     </p:spTree>
     <p:extLst>
       <p:ext uri="{BB962C8B-B14F-4D97-AF65-F5344CB8AC3E}">
@@ -7685,14 +7786,38 @@
           <a:lstStyle/>
           <a:p>
             <a:r>
-              <a:rPr lang="fr-BE" dirty="0"/>
-              <a:t>Pull </a:t>
-            </a:r>
-            <a:r>
-              <a:rPr lang="fr-BE" dirty="0" err="1"/>
-              <a:t>request</a:t>
-            </a:r>
-            <a:endParaRPr lang="en-US" dirty="0"/>
+              <a:rPr lang="en-GB" noProof="0" dirty="0"/>
+              <a:t>Pull request</a:t>
+            </a:r>
+          </a:p>
+        </p:txBody>
+      </p:sp>
+      <p:sp>
+        <p:nvSpPr>
+          <p:cNvPr id="4" name="Espace réservé du numéro de diapositive 3">
+            <a:extLst>
+              <a:ext uri="{FF2B5EF4-FFF2-40B4-BE49-F238E27FC236}">
+                <a16:creationId xmlns:a16="http://schemas.microsoft.com/office/drawing/2014/main" id="{306344A8-108A-3CAE-FEC7-0F3B752E2090}"/>
+              </a:ext>
+            </a:extLst>
+          </p:cNvPr>
+          <p:cNvSpPr>
+            <a:spLocks noGrp="1"/>
+          </p:cNvSpPr>
+          <p:nvPr>
+            <p:ph type="sldNum" idx="12"/>
+          </p:nvPr>
+        </p:nvSpPr>
+        <p:spPr/>
+        <p:txBody>
+          <a:bodyPr/>
+          <a:lstStyle/>
+          <a:p>
+            <a:fld id="{CDC1ED17-DE62-4D43-9CDA-4A6C9B2745D4}" type="slidenum">
+              <a:rPr lang="en-GB" noProof="0" smtClean="0"/>
+              <a:t>7</a:t>
+            </a:fld>
+            <a:endParaRPr lang="en-GB" noProof="0" dirty="0"/>
           </a:p>
         </p:txBody>
       </p:sp>
@@ -7703,7 +7828,7 @@
             <a:spLocks noGrp="1"/>
           </p:cNvSpPr>
           <p:nvPr>
-            <p:ph idx="1"/>
+            <p:ph sz="half" idx="2"/>
           </p:nvPr>
         </p:nvSpPr>
         <p:spPr/>
@@ -7712,99 +7837,94 @@
           <a:lstStyle/>
           <a:p>
             <a:r>
-              <a:rPr lang="fr-BE" dirty="0"/>
-              <a:t>Main </a:t>
-            </a:r>
-            <a:r>
-              <a:rPr lang="fr-BE" dirty="0" err="1"/>
-              <a:t>steps</a:t>
-            </a:r>
-            <a:endParaRPr lang="fr-BE" dirty="0"/>
+              <a:rPr lang="en-GB" noProof="0" dirty="0"/>
+              <a:t>Main steps</a:t>
+            </a:r>
           </a:p>
           <a:p>
             <a:pPr lvl="1"/>
             <a:r>
-              <a:rPr lang="en-GB" dirty="0"/>
+              <a:rPr lang="en-GB" noProof="0" dirty="0"/>
               <a:t>Create the feature in a dedicated branch in a local repository</a:t>
             </a:r>
           </a:p>
           <a:p>
             <a:pPr lvl="1"/>
             <a:r>
-              <a:rPr lang="en-GB" dirty="0"/>
+              <a:rPr lang="en-GB" noProof="0" dirty="0"/>
               <a:t>Push the branch to a public repository (on </a:t>
             </a:r>
             <a:r>
-              <a:rPr lang="en-GB" dirty="0" err="1"/>
+              <a:rPr lang="en-GB" noProof="0" dirty="0" err="1"/>
               <a:t>Github</a:t>
             </a:r>
             <a:r>
-              <a:rPr lang="en-GB" dirty="0"/>
+              <a:rPr lang="en-GB" noProof="0" dirty="0"/>
               <a:t>)</a:t>
             </a:r>
           </a:p>
           <a:p>
             <a:pPr lvl="1"/>
             <a:r>
-              <a:rPr lang="en-GB" dirty="0"/>
+              <a:rPr lang="en-GB" noProof="0" dirty="0"/>
               <a:t>Create a pull request (on </a:t>
             </a:r>
             <a:r>
-              <a:rPr lang="en-GB" dirty="0" err="1"/>
+              <a:rPr lang="en-GB" noProof="0" dirty="0" err="1"/>
               <a:t>Github</a:t>
             </a:r>
             <a:r>
-              <a:rPr lang="en-GB" dirty="0"/>
+              <a:rPr lang="en-GB" noProof="0" dirty="0"/>
               <a:t>)</a:t>
             </a:r>
           </a:p>
           <a:p>
             <a:pPr lvl="1"/>
             <a:r>
-              <a:rPr lang="en-GB" dirty="0"/>
+              <a:rPr lang="en-GB" noProof="0" dirty="0"/>
               <a:t>Review of the code, discussions, modifications </a:t>
             </a:r>
             <a:r>
-              <a:rPr lang="en-GB" dirty="0" err="1"/>
+              <a:rPr lang="en-GB" noProof="0" dirty="0" err="1"/>
               <a:t>bu</a:t>
             </a:r>
             <a:r>
-              <a:rPr lang="en-GB" dirty="0"/>
+              <a:rPr lang="en-GB" noProof="0" dirty="0"/>
               <a:t> the other developers</a:t>
             </a:r>
           </a:p>
           <a:p>
             <a:pPr lvl="1"/>
             <a:r>
-              <a:rPr lang="en-GB" dirty="0"/>
+              <a:rPr lang="en-GB" noProof="0" dirty="0"/>
               <a:t>The project maintainer merges the feature into the official repository and closes the pull request.</a:t>
             </a:r>
           </a:p>
           <a:p>
             <a:r>
-              <a:rPr lang="en-GB" dirty="0"/>
+              <a:rPr lang="en-GB" noProof="0" dirty="0"/>
               <a:t>Remarks:</a:t>
             </a:r>
           </a:p>
           <a:p>
             <a:pPr lvl="1"/>
             <a:r>
-              <a:rPr lang="en-GB" dirty="0"/>
+              <a:rPr lang="en-GB" noProof="0" dirty="0"/>
               <a:t>“Social control” (everything is public)</a:t>
             </a:r>
           </a:p>
           <a:p>
             <a:pPr lvl="1"/>
             <a:r>
-              <a:rPr lang="en-GB" dirty="0"/>
+              <a:rPr lang="en-GB" noProof="0" dirty="0"/>
               <a:t>Final decision belongs to the owner of the project</a:t>
             </a:r>
           </a:p>
           <a:p>
-            <a:endParaRPr lang="en-GB" dirty="0"/>
-          </a:p>
-          <a:p>
-            <a:endParaRPr lang="en-US" dirty="0"/>
+            <a:endParaRPr lang="en-GB" noProof="0" dirty="0"/>
+          </a:p>
+          <a:p>
+            <a:endParaRPr lang="en-GB" noProof="0" dirty="0"/>
           </a:p>
         </p:txBody>
       </p:sp>
@@ -7821,19 +7941,28 @@
             <a:spLocks noGrp="1"/>
           </p:cNvSpPr>
           <p:nvPr>
-            <p:ph type="ftr" sz="quarter" idx="11"/>
+            <p:ph type="ftr" sz="quarter" idx="4294967295"/>
           </p:nvPr>
         </p:nvSpPr>
-        <p:spPr/>
+        <p:spPr>
+          <a:xfrm>
+            <a:off x="0" y="0"/>
+            <a:ext cx="0" cy="0"/>
+          </a:xfrm>
+        </p:spPr>
         <p:txBody>
           <a:bodyPr/>
           <a:lstStyle/>
           <a:p>
             <a:r>
-              <a:rPr lang="en-US"/>
-              <a:t>JD+ on Github</a:t>
-            </a:r>
-            <a:endParaRPr lang="en-GB"/>
+              <a:rPr lang="en-GB" noProof="0" dirty="0"/>
+              <a:t>JD+ on </a:t>
+            </a:r>
+            <a:r>
+              <a:rPr lang="en-GB" noProof="0" dirty="0" err="1"/>
+              <a:t>Github</a:t>
+            </a:r>
+            <a:endParaRPr lang="en-GB" noProof="0" dirty="0"/>
           </a:p>
         </p:txBody>
       </p:sp>
@@ -7883,10 +8012,38 @@
           <a:lstStyle/>
           <a:p>
             <a:r>
-              <a:rPr lang="fr-BE" dirty="0"/>
+              <a:rPr lang="en-GB" noProof="0" dirty="0"/>
               <a:t>Wiki</a:t>
             </a:r>
-            <a:endParaRPr lang="en-US" dirty="0"/>
+          </a:p>
+        </p:txBody>
+      </p:sp>
+      <p:sp>
+        <p:nvSpPr>
+          <p:cNvPr id="4" name="Espace réservé du numéro de diapositive 3">
+            <a:extLst>
+              <a:ext uri="{FF2B5EF4-FFF2-40B4-BE49-F238E27FC236}">
+                <a16:creationId xmlns:a16="http://schemas.microsoft.com/office/drawing/2014/main" id="{DA62CB97-A5CE-8608-B632-2DB3C51A9A8C}"/>
+              </a:ext>
+            </a:extLst>
+          </p:cNvPr>
+          <p:cNvSpPr>
+            <a:spLocks noGrp="1"/>
+          </p:cNvSpPr>
+          <p:nvPr>
+            <p:ph type="sldNum" idx="12"/>
+          </p:nvPr>
+        </p:nvSpPr>
+        <p:spPr/>
+        <p:txBody>
+          <a:bodyPr/>
+          <a:lstStyle/>
+          <a:p>
+            <a:fld id="{CDC1ED17-DE62-4D43-9CDA-4A6C9B2745D4}" type="slidenum">
+              <a:rPr lang="en-GB" noProof="0" smtClean="0"/>
+              <a:t>8</a:t>
+            </a:fld>
+            <a:endParaRPr lang="en-GB" noProof="0" dirty="0"/>
           </a:p>
         </p:txBody>
       </p:sp>
@@ -7897,7 +8054,7 @@
             <a:spLocks noGrp="1"/>
           </p:cNvSpPr>
           <p:nvPr>
-            <p:ph idx="1"/>
+            <p:ph sz="half" idx="2"/>
           </p:nvPr>
         </p:nvSpPr>
         <p:spPr/>
@@ -7906,21 +8063,50 @@
           <a:lstStyle/>
           <a:p>
             <a:r>
-              <a:rPr lang="fr-BE" dirty="0" err="1"/>
-              <a:t>Technical</a:t>
-            </a:r>
-            <a:r>
-              <a:rPr lang="fr-BE" dirty="0"/>
-              <a:t> documentation on the use of the </a:t>
-            </a:r>
-            <a:r>
-              <a:rPr lang="fr-BE" dirty="0" err="1"/>
-              <a:t>libraries</a:t>
-            </a:r>
-            <a:endParaRPr lang="fr-BE" dirty="0"/>
-          </a:p>
-          <a:p>
-            <a:endParaRPr lang="en-US" dirty="0"/>
+              <a:rPr lang="en-GB" noProof="0" dirty="0"/>
+              <a:t>Technical documentation on the use of the libraries</a:t>
+            </a:r>
+          </a:p>
+          <a:p>
+            <a:endParaRPr lang="en-GB" noProof="0" dirty="0"/>
+          </a:p>
+        </p:txBody>
+      </p:sp>
+      <p:sp>
+        <p:nvSpPr>
+          <p:cNvPr id="5" name="Espace réservé du pied de page 4">
+            <a:extLst>
+              <a:ext uri="{FF2B5EF4-FFF2-40B4-BE49-F238E27FC236}">
+                <a16:creationId xmlns:a16="http://schemas.microsoft.com/office/drawing/2014/main" id="{C9FED082-3E79-7A3B-D60A-72C513E55E33}"/>
+              </a:ext>
+            </a:extLst>
+          </p:cNvPr>
+          <p:cNvSpPr>
+            <a:spLocks noGrp="1"/>
+          </p:cNvSpPr>
+          <p:nvPr>
+            <p:ph type="ftr" sz="quarter" idx="4294967295"/>
+          </p:nvPr>
+        </p:nvSpPr>
+        <p:spPr>
+          <a:xfrm>
+            <a:off x="0" y="0"/>
+            <a:ext cx="0" cy="0"/>
+          </a:xfrm>
+        </p:spPr>
+        <p:txBody>
+          <a:bodyPr/>
+          <a:lstStyle/>
+          <a:p>
+            <a:r>
+              <a:rPr lang="en-GB" noProof="0" dirty="0"/>
+              <a:t>JD+ on </a:t>
+            </a:r>
+            <a:r>
+              <a:rPr lang="en-GB" noProof="0" dirty="0" err="1"/>
+              <a:t>Github</a:t>
+            </a:r>
+            <a:endParaRPr lang="en-GB" noProof="0" dirty="0"/>
           </a:p>
         </p:txBody>
       </p:sp>
@@ -7978,35 +8164,6 @@
           </a:extLst>
         </p:spPr>
       </p:pic>
-      <p:sp>
-        <p:nvSpPr>
-          <p:cNvPr id="5" name="Espace réservé du pied de page 4">
-            <a:extLst>
-              <a:ext uri="{FF2B5EF4-FFF2-40B4-BE49-F238E27FC236}">
-                <a16:creationId xmlns:a16="http://schemas.microsoft.com/office/drawing/2014/main" id="{C9FED082-3E79-7A3B-D60A-72C513E55E33}"/>
-              </a:ext>
-            </a:extLst>
-          </p:cNvPr>
-          <p:cNvSpPr>
-            <a:spLocks noGrp="1"/>
-          </p:cNvSpPr>
-          <p:nvPr>
-            <p:ph type="ftr" sz="quarter" idx="11"/>
-          </p:nvPr>
-        </p:nvSpPr>
-        <p:spPr/>
-        <p:txBody>
-          <a:bodyPr/>
-          <a:lstStyle/>
-          <a:p>
-            <a:r>
-              <a:rPr lang="en-US"/>
-              <a:t>JD+ on Github</a:t>
-            </a:r>
-            <a:endParaRPr lang="en-GB"/>
-          </a:p>
-        </p:txBody>
-      </p:sp>
     </p:spTree>
     <p:extLst>
       <p:ext uri="{BB962C8B-B14F-4D97-AF65-F5344CB8AC3E}">
@@ -8059,18 +8216,51 @@
           <a:lstStyle/>
           <a:p>
             <a:r>
-              <a:rPr lang="en-GB" dirty="0" err="1"/>
-              <a:t>JDemetra</a:t>
-            </a:r>
-            <a:r>
-              <a:rPr lang="en-GB" dirty="0"/>
-              <a:t> resources on </a:t>
-            </a:r>
-            <a:r>
-              <a:rPr lang="en-GB" dirty="0" err="1"/>
+              <a:rPr lang="en-GB" noProof="0" dirty="0"/>
+              <a:t>JDemetra resources on </a:t>
+            </a:r>
+            <a:r>
+              <a:rPr lang="en-GB" noProof="0" dirty="0" err="1"/>
               <a:t>Github</a:t>
             </a:r>
-            <a:endParaRPr lang="en-GB" dirty="0"/>
+            <a:r>
+              <a:rPr lang="en-GB" noProof="0" dirty="0"/>
+              <a:t> </a:t>
+            </a:r>
+            <a:r>
+              <a:rPr lang="en-GB" sz="2400" noProof="0" dirty="0"/>
+              <a:t>(and others)</a:t>
+            </a:r>
+            <a:endParaRPr lang="en-GB" noProof="0" dirty="0"/>
+          </a:p>
+        </p:txBody>
+      </p:sp>
+      <p:sp>
+        <p:nvSpPr>
+          <p:cNvPr id="4" name="Espace réservé du numéro de diapositive 3">
+            <a:extLst>
+              <a:ext uri="{FF2B5EF4-FFF2-40B4-BE49-F238E27FC236}">
+                <a16:creationId xmlns:a16="http://schemas.microsoft.com/office/drawing/2014/main" id="{82ECD94F-BE81-E446-3F81-7590FD8B1856}"/>
+              </a:ext>
+            </a:extLst>
+          </p:cNvPr>
+          <p:cNvSpPr>
+            <a:spLocks noGrp="1"/>
+          </p:cNvSpPr>
+          <p:nvPr>
+            <p:ph type="sldNum" idx="12"/>
+          </p:nvPr>
+        </p:nvSpPr>
+        <p:spPr/>
+        <p:txBody>
+          <a:bodyPr/>
+          <a:lstStyle/>
+          <a:p>
+            <a:fld id="{CDC1ED17-DE62-4D43-9CDA-4A6C9B2745D4}" type="slidenum">
+              <a:rPr lang="en-GB" noProof="0" smtClean="0"/>
+              <a:t>9</a:t>
+            </a:fld>
+            <a:endParaRPr lang="en-GB" noProof="0" dirty="0"/>
           </a:p>
         </p:txBody>
       </p:sp>
@@ -8087,7 +8277,7 @@
             <a:spLocks noGrp="1"/>
           </p:cNvSpPr>
           <p:nvPr>
-            <p:ph idx="1"/>
+            <p:ph sz="half" idx="2"/>
           </p:nvPr>
         </p:nvSpPr>
         <p:spPr/>
@@ -8096,101 +8286,101 @@
           <a:lstStyle/>
           <a:p>
             <a:r>
-              <a:rPr lang="en-GB" sz="2300" dirty="0"/>
+              <a:rPr lang="en-GB" sz="2300" noProof="0" dirty="0"/>
               <a:t>Java libraries (including GUI/Cruncher)</a:t>
             </a:r>
           </a:p>
           <a:p>
             <a:pPr lvl="1"/>
             <a:r>
-              <a:rPr lang="en-GB" dirty="0">
+              <a:rPr lang="en-GB" noProof="0" dirty="0">
                 <a:hlinkClick r:id="rId2"/>
               </a:rPr>
               <a:t>https://github.com/jdemetra</a:t>
             </a:r>
-            <a:endParaRPr lang="en-GB" dirty="0"/>
-          </a:p>
-          <a:p>
-            <a:r>
-              <a:rPr lang="en-GB" sz="2300" dirty="0"/>
+            <a:endParaRPr lang="en-GB" noProof="0" dirty="0"/>
+          </a:p>
+          <a:p>
+            <a:r>
+              <a:rPr lang="en-GB" sz="2300" noProof="0" dirty="0"/>
               <a:t>R packages</a:t>
             </a:r>
           </a:p>
           <a:p>
             <a:pPr lvl="1"/>
             <a:r>
-              <a:rPr lang="en-GB" dirty="0">
+              <a:rPr lang="en-GB" noProof="0" dirty="0">
                 <a:hlinkClick r:id="rId3"/>
               </a:rPr>
               <a:t>https://github.com/rjdverse</a:t>
             </a:r>
             <a:r>
-              <a:rPr lang="en-GB" dirty="0"/>
+              <a:rPr lang="en-GB" noProof="0" dirty="0"/>
               <a:t> </a:t>
             </a:r>
           </a:p>
           <a:p>
             <a:r>
-              <a:rPr lang="en-GB" dirty="0"/>
+              <a:rPr lang="en-GB" noProof="0" dirty="0"/>
               <a:t>Documentation</a:t>
             </a:r>
           </a:p>
           <a:p>
             <a:pPr lvl="1"/>
             <a:r>
-              <a:rPr lang="en-GB" dirty="0">
+              <a:rPr lang="en-GB" noProof="0" dirty="0">
                 <a:hlinkClick r:id="rId4"/>
               </a:rPr>
               <a:t>https://doc.jdemetra.org/</a:t>
             </a:r>
             <a:r>
-              <a:rPr lang="en-GB" dirty="0"/>
+              <a:rPr lang="en-GB" noProof="0" dirty="0"/>
               <a:t>  </a:t>
             </a:r>
           </a:p>
           <a:p>
             <a:pPr lvl="1"/>
             <a:r>
-              <a:rPr lang="en-GB" dirty="0">
+              <a:rPr lang="en-GB" noProof="0" dirty="0">
                 <a:hlinkClick r:id="rId5"/>
               </a:rPr>
               <a:t>https://rjdverse.r-universe.dev/packages</a:t>
             </a:r>
-            <a:endParaRPr lang="en-GB" dirty="0"/>
-          </a:p>
-          <a:p>
-            <a:r>
-              <a:rPr lang="en-GB" sz="2300" dirty="0"/>
+            <a:endParaRPr lang="en-GB" noProof="0" dirty="0"/>
+          </a:p>
+          <a:p>
+            <a:r>
+              <a:rPr lang="en-GB" sz="2300" noProof="0" dirty="0"/>
               <a:t>Training</a:t>
             </a:r>
           </a:p>
           <a:p>
             <a:pPr lvl="1"/>
             <a:r>
-              <a:rPr lang="en-GB" dirty="0">
+              <a:rPr lang="en-GB" noProof="0" dirty="0">
                 <a:hlinkClick r:id="rId6"/>
               </a:rPr>
               <a:t>https://github.com/palatej/estp202</a:t>
             </a:r>
             <a:r>
-              <a:rPr lang="en-GB" dirty="0"/>
+              <a:rPr lang="en-GB" noProof="0" dirty="0"/>
               <a:t>6  </a:t>
             </a:r>
           </a:p>
           <a:p>
-            <a:endParaRPr lang="en-GB" sz="2300" dirty="0"/>
+            <a:endParaRPr lang="en-GB" sz="2300" noProof="0" dirty="0"/>
           </a:p>
           <a:p>
             <a:pPr lvl="1"/>
-            <a:endParaRPr lang="en-GB" dirty="0"/>
+            <a:endParaRPr lang="en-GB" noProof="0" dirty="0"/>
           </a:p>
           <a:p>
             <a:pPr lvl="1"/>
-            <a:endParaRPr lang="en-GB" dirty="0"/>
+            <a:endParaRPr lang="en-GB" noProof="0" dirty="0"/>
           </a:p>
           <a:p>
             <a:pPr lvl="1"/>
-            <a:endParaRPr lang="en-GB" dirty="0"/>
+            <a:endParaRPr lang="en-GB" noProof="0" dirty="0"/>
           </a:p>
         </p:txBody>
       </p:sp>
@@ -8207,19 +8397,28 @@
             <a:spLocks noGrp="1"/>
           </p:cNvSpPr>
           <p:nvPr>
-            <p:ph type="ftr" sz="quarter" idx="11"/>
+            <p:ph type="ftr" sz="quarter" idx="4294967295"/>
           </p:nvPr>
         </p:nvSpPr>
-        <p:spPr/>
+        <p:spPr>
+          <a:xfrm>
+            <a:off x="0" y="0"/>
+            <a:ext cx="0" cy="0"/>
+          </a:xfrm>
+        </p:spPr>
         <p:txBody>
           <a:bodyPr/>
           <a:lstStyle/>
           <a:p>
             <a:r>
-              <a:rPr lang="en-US"/>
-              <a:t>JD+ on Github</a:t>
-            </a:r>
-            <a:endParaRPr lang="en-GB"/>
+              <a:rPr lang="en-GB" noProof="0" dirty="0"/>
+              <a:t>JD+ on </a:t>
+            </a:r>
+            <a:r>
+              <a:rPr lang="en-GB" noProof="0" dirty="0" err="1"/>
+              <a:t>Github</a:t>
+            </a:r>
+            <a:endParaRPr lang="en-GB" noProof="0" dirty="0"/>
           </a:p>
         </p:txBody>
       </p:sp>
@@ -9108,6 +9307,17 @@
 </file>
 
 <file path=customXml/item1.xml><?xml version="1.0" encoding="utf-8"?>
+<p:properties xmlns:p="http://schemas.microsoft.com/office/2006/metadata/properties" xmlns:xsi="http://www.w3.org/2001/XMLSchema-instance" xmlns:pc="http://schemas.microsoft.com/office/infopath/2007/PartnerControls">
+  <documentManagement>
+    <lcf76f155ced4ddcb4097134ff3c332f xmlns="0e422b70-e85d-4377-8ee0-b6227433d381">
+      <Terms xmlns="http://schemas.microsoft.com/office/infopath/2007/PartnerControls"/>
+    </lcf76f155ced4ddcb4097134ff3c332f>
+    <TaxCatchAll xmlns="199f642e-5af9-486c-ac06-f366742ef41a"/>
+  </documentManagement>
+</p:properties>
+</file>
+
+<file path=customXml/item2.xml><?xml version="1.0" encoding="utf-8"?>
 <ct:contentTypeSchema xmlns:ct="http://schemas.microsoft.com/office/2006/metadata/contentType" xmlns:ma="http://schemas.microsoft.com/office/2006/metadata/properties/metaAttributes" ct:_="" ma:_="" ma:contentTypeName="Document" ma:contentTypeID="0x010100E6AA5C57F8EADE4E9CD6BB064C0C3195" ma:contentTypeVersion="16" ma:contentTypeDescription="Create a new document." ma:contentTypeScope="" ma:versionID="bb51c19a58f458ddcddd050a07659236">
   <xsd:schema xmlns:xsd="http://www.w3.org/2001/XMLSchema" xmlns:xs="http://www.w3.org/2001/XMLSchema" xmlns:p="http://schemas.microsoft.com/office/2006/metadata/properties" xmlns:ns2="0e422b70-e85d-4377-8ee0-b6227433d381" xmlns:ns3="199f642e-5af9-486c-ac06-f366742ef41a" targetNamespace="http://schemas.microsoft.com/office/2006/metadata/properties" ma:root="true" ma:fieldsID="0ee7a3bac0352a48a43420936abd968a" ns2:_="" ns3:_="">
     <xsd:import namespace="0e422b70-e85d-4377-8ee0-b6227433d381"/>
@@ -9348,17 +9558,6 @@
 </ct:contentTypeSchema>
 </file>
 
-<file path=customXml/item2.xml><?xml version="1.0" encoding="utf-8"?>
-<p:properties xmlns:p="http://schemas.microsoft.com/office/2006/metadata/properties" xmlns:xsi="http://www.w3.org/2001/XMLSchema-instance" xmlns:pc="http://schemas.microsoft.com/office/infopath/2007/PartnerControls">
-  <documentManagement>
-    <lcf76f155ced4ddcb4097134ff3c332f xmlns="0e422b70-e85d-4377-8ee0-b6227433d381">
-      <Terms xmlns="http://schemas.microsoft.com/office/infopath/2007/PartnerControls"/>
-    </lcf76f155ced4ddcb4097134ff3c332f>
-    <TaxCatchAll xmlns="199f642e-5af9-486c-ac06-f366742ef41a"/>
-  </documentManagement>
-</p:properties>
-</file>
-
 <file path=customXml/item3.xml><?xml version="1.0" encoding="utf-8"?>
 <?mso-contentType ?>
 <FormTemplates xmlns="http://schemas.microsoft.com/sharepoint/v3/contenttype/forms">
@@ -9369,6 +9568,23 @@
 </file>
 
 <file path=customXml/itemProps1.xml><?xml version="1.0" encoding="utf-8"?>
+<ds:datastoreItem xmlns:ds="http://schemas.openxmlformats.org/officeDocument/2006/customXml" ds:itemID="{2D6C293B-B8B4-4284-A17E-9F9E4C32B25A}">
+  <ds:schemaRefs>
+    <ds:schemaRef ds:uri="http://schemas.microsoft.com/office/2006/documentManagement/types"/>
+    <ds:schemaRef ds:uri="http://purl.org/dc/elements/1.1/"/>
+    <ds:schemaRef ds:uri="http://purl.org/dc/terms/"/>
+    <ds:schemaRef ds:uri="http://purl.org/dc/dcmitype/"/>
+    <ds:schemaRef ds:uri="0e422b70-e85d-4377-8ee0-b6227433d381"/>
+    <ds:schemaRef ds:uri="http://schemas.microsoft.com/office/infopath/2007/PartnerControls"/>
+    <ds:schemaRef ds:uri="199f642e-5af9-486c-ac06-f366742ef41a"/>
+    <ds:schemaRef ds:uri="http://schemas.openxmlformats.org/package/2006/metadata/core-properties"/>
+    <ds:schemaRef ds:uri="http://schemas.microsoft.com/office/2006/metadata/properties"/>
+    <ds:schemaRef ds:uri="http://www.w3.org/XML/1998/namespace"/>
+  </ds:schemaRefs>
+</ds:datastoreItem>
+</file>
+
+<file path=customXml/itemProps2.xml><?xml version="1.0" encoding="utf-8"?>
 <ds:datastoreItem xmlns:ds="http://schemas.openxmlformats.org/officeDocument/2006/customXml" ds:itemID="{04B464EA-1576-49DD-9675-1E3399D4D196}">
   <ds:schemaRefs>
     <ds:schemaRef ds:uri="http://schemas.microsoft.com/office/2006/metadata/contentType"/>
@@ -9387,23 +9603,6 @@
 </ds:datastoreItem>
 </file>
 
-<file path=customXml/itemProps2.xml><?xml version="1.0" encoding="utf-8"?>
-<ds:datastoreItem xmlns:ds="http://schemas.openxmlformats.org/officeDocument/2006/customXml" ds:itemID="{2D6C293B-B8B4-4284-A17E-9F9E4C32B25A}">
-  <ds:schemaRefs>
-    <ds:schemaRef ds:uri="http://schemas.microsoft.com/office/2006/documentManagement/types"/>
-    <ds:schemaRef ds:uri="http://purl.org/dc/elements/1.1/"/>
-    <ds:schemaRef ds:uri="http://purl.org/dc/terms/"/>
-    <ds:schemaRef ds:uri="http://purl.org/dc/dcmitype/"/>
-    <ds:schemaRef ds:uri="0e422b70-e85d-4377-8ee0-b6227433d381"/>
-    <ds:schemaRef ds:uri="http://schemas.microsoft.com/office/infopath/2007/PartnerControls"/>
-    <ds:schemaRef ds:uri="199f642e-5af9-486c-ac06-f366742ef41a"/>
-    <ds:schemaRef ds:uri="http://schemas.openxmlformats.org/package/2006/metadata/core-properties"/>
-    <ds:schemaRef ds:uri="http://schemas.microsoft.com/office/2006/metadata/properties"/>
-    <ds:schemaRef ds:uri="http://www.w3.org/XML/1998/namespace"/>
-  </ds:schemaRefs>
-</ds:datastoreItem>
-</file>
-
 <file path=customXml/itemProps3.xml><?xml version="1.0" encoding="utf-8"?>
 <ds:datastoreItem xmlns:ds="http://schemas.openxmlformats.org/officeDocument/2006/customXml" ds:itemID="{67DD9E9F-9EEB-4105-B29B-819486C2855A}">
   <ds:schemaRefs>

--- a/1.4 JD+ on Github.pptx
+++ b/1.4 JD+ on Github.pptx
@@ -276,7 +276,7 @@
       <p15:notesGuideLst xmlns:p15="http://schemas.microsoft.com/office/powerpoint/2012/main"/>
     </p:ext>
     <p:ext uri="http://customooxmlschemas.google.com/">
-      <go:slidesCustomData xmlns:mc="http://schemas.openxmlformats.org/markup-compatibility/2006" xmlns:mv="urn:schemas-microsoft-com:mac:vml" xmlns:c="http://schemas.openxmlformats.org/drawingml/2006/chart" xmlns:dgm="http://schemas.openxmlformats.org/drawingml/2006/diagram" xmlns:o="urn:schemas-microsoft-com:office:office" xmlns:v="urn:schemas-microsoft-com:vml" xmlns:pvml="urn:schemas-microsoft-com:office:powerpoint" xmlns:com="http://schemas.openxmlformats.org/drawingml/2006/compatibility" xmlns:p14="http://schemas.microsoft.com/office/powerpoint/2010/main" xmlns:p15="http://schemas.microsoft.com/office/powerpoint/2012/main" xmlns:ahyp="http://schemas.microsoft.com/office/drawing/2018/hyperlinkcolor" xmlns:go="http://customooxmlschemas.google.com/" xmlns="" r:id="rId59" roundtripDataSignature="AMtx7mh3YP3xexYcFoahXa2ehi0H5V4Zaw=="/>
+      <go:slidesCustomData xmlns="" xmlns:go="http://customooxmlschemas.google.com/" xmlns:ahyp="http://schemas.microsoft.com/office/drawing/2018/hyperlinkcolor" xmlns:p15="http://schemas.microsoft.com/office/powerpoint/2012/main" xmlns:p14="http://schemas.microsoft.com/office/powerpoint/2010/main" xmlns:com="http://schemas.openxmlformats.org/drawingml/2006/compatibility" xmlns:pvml="urn:schemas-microsoft-com:office:powerpoint" xmlns:v="urn:schemas-microsoft-com:vml" xmlns:o="urn:schemas-microsoft-com:office:office" xmlns:dgm="http://schemas.openxmlformats.org/drawingml/2006/diagram" xmlns:c="http://schemas.openxmlformats.org/drawingml/2006/chart" xmlns:mv="urn:schemas-microsoft-com:mac:vml" xmlns:mc="http://schemas.openxmlformats.org/markup-compatibility/2006" r:id="rId59" roundtripDataSignature="AMtx7mh3YP3xexYcFoahXa2ehi0H5V4Zaw=="/>
     </p:ext>
   </p:extLst>
 </p:presentation>
@@ -376,7 +376,7 @@
           <a:p>
             <a:fld id="{0CBFB8CE-488C-4A7E-87F2-3AF6127C51C1}" type="datetimeFigureOut">
               <a:rPr lang="en-IE" smtClean="0"/>
-              <a:t>29/09/2026</a:t>
+              <a:t>01/10/2026</a:t>
             </a:fld>
             <a:endParaRPr lang="en-IE"/>
           </a:p>
@@ -6232,8 +6232,12 @@
           <a:lstStyle/>
           <a:p>
             <a:r>
+              <a:rPr lang="en-GB" noProof="0"/>
+              <a:t>1.4 JD</a:t>
+            </a:r>
+            <a:r>
               <a:rPr lang="en-GB" noProof="0" dirty="0"/>
-              <a:t>JD+ on </a:t>
+              <a:t>+ on </a:t>
             </a:r>
             <a:r>
               <a:rPr lang="en-GB" noProof="0" dirty="0" err="1"/>
@@ -9307,17 +9311,6 @@
 </file>
 
 <file path=customXml/item1.xml><?xml version="1.0" encoding="utf-8"?>
-<p:properties xmlns:p="http://schemas.microsoft.com/office/2006/metadata/properties" xmlns:xsi="http://www.w3.org/2001/XMLSchema-instance" xmlns:pc="http://schemas.microsoft.com/office/infopath/2007/PartnerControls">
-  <documentManagement>
-    <lcf76f155ced4ddcb4097134ff3c332f xmlns="0e422b70-e85d-4377-8ee0-b6227433d381">
-      <Terms xmlns="http://schemas.microsoft.com/office/infopath/2007/PartnerControls"/>
-    </lcf76f155ced4ddcb4097134ff3c332f>
-    <TaxCatchAll xmlns="199f642e-5af9-486c-ac06-f366742ef41a"/>
-  </documentManagement>
-</p:properties>
-</file>
-
-<file path=customXml/item2.xml><?xml version="1.0" encoding="utf-8"?>
 <ct:contentTypeSchema xmlns:ct="http://schemas.microsoft.com/office/2006/metadata/contentType" xmlns:ma="http://schemas.microsoft.com/office/2006/metadata/properties/metaAttributes" ct:_="" ma:_="" ma:contentTypeName="Document" ma:contentTypeID="0x010100E6AA5C57F8EADE4E9CD6BB064C0C3195" ma:contentTypeVersion="16" ma:contentTypeDescription="Create a new document." ma:contentTypeScope="" ma:versionID="bb51c19a58f458ddcddd050a07659236">
   <xsd:schema xmlns:xsd="http://www.w3.org/2001/XMLSchema" xmlns:xs="http://www.w3.org/2001/XMLSchema" xmlns:p="http://schemas.microsoft.com/office/2006/metadata/properties" xmlns:ns2="0e422b70-e85d-4377-8ee0-b6227433d381" xmlns:ns3="199f642e-5af9-486c-ac06-f366742ef41a" targetNamespace="http://schemas.microsoft.com/office/2006/metadata/properties" ma:root="true" ma:fieldsID="0ee7a3bac0352a48a43420936abd968a" ns2:_="" ns3:_="">
     <xsd:import namespace="0e422b70-e85d-4377-8ee0-b6227433d381"/>
@@ -9558,6 +9551,17 @@
 </ct:contentTypeSchema>
 </file>
 
+<file path=customXml/item2.xml><?xml version="1.0" encoding="utf-8"?>
+<p:properties xmlns:p="http://schemas.microsoft.com/office/2006/metadata/properties" xmlns:xsi="http://www.w3.org/2001/XMLSchema-instance" xmlns:pc="http://schemas.microsoft.com/office/infopath/2007/PartnerControls">
+  <documentManagement>
+    <lcf76f155ced4ddcb4097134ff3c332f xmlns="0e422b70-e85d-4377-8ee0-b6227433d381">
+      <Terms xmlns="http://schemas.microsoft.com/office/infopath/2007/PartnerControls"/>
+    </lcf76f155ced4ddcb4097134ff3c332f>
+    <TaxCatchAll xmlns="199f642e-5af9-486c-ac06-f366742ef41a"/>
+  </documentManagement>
+</p:properties>
+</file>
+
 <file path=customXml/item3.xml><?xml version="1.0" encoding="utf-8"?>
 <?mso-contentType ?>
 <FormTemplates xmlns="http://schemas.microsoft.com/sharepoint/v3/contenttype/forms">
@@ -9568,23 +9572,6 @@
 </file>
 
 <file path=customXml/itemProps1.xml><?xml version="1.0" encoding="utf-8"?>
-<ds:datastoreItem xmlns:ds="http://schemas.openxmlformats.org/officeDocument/2006/customXml" ds:itemID="{2D6C293B-B8B4-4284-A17E-9F9E4C32B25A}">
-  <ds:schemaRefs>
-    <ds:schemaRef ds:uri="http://schemas.microsoft.com/office/2006/documentManagement/types"/>
-    <ds:schemaRef ds:uri="http://purl.org/dc/elements/1.1/"/>
-    <ds:schemaRef ds:uri="http://purl.org/dc/terms/"/>
-    <ds:schemaRef ds:uri="http://purl.org/dc/dcmitype/"/>
-    <ds:schemaRef ds:uri="0e422b70-e85d-4377-8ee0-b6227433d381"/>
-    <ds:schemaRef ds:uri="http://schemas.microsoft.com/office/infopath/2007/PartnerControls"/>
-    <ds:schemaRef ds:uri="199f642e-5af9-486c-ac06-f366742ef41a"/>
-    <ds:schemaRef ds:uri="http://schemas.openxmlformats.org/package/2006/metadata/core-properties"/>
-    <ds:schemaRef ds:uri="http://schemas.microsoft.com/office/2006/metadata/properties"/>
-    <ds:schemaRef ds:uri="http://www.w3.org/XML/1998/namespace"/>
-  </ds:schemaRefs>
-</ds:datastoreItem>
-</file>
-
-<file path=customXml/itemProps2.xml><?xml version="1.0" encoding="utf-8"?>
 <ds:datastoreItem xmlns:ds="http://schemas.openxmlformats.org/officeDocument/2006/customXml" ds:itemID="{04B464EA-1576-49DD-9675-1E3399D4D196}">
   <ds:schemaRefs>
     <ds:schemaRef ds:uri="http://schemas.microsoft.com/office/2006/metadata/contentType"/>
@@ -9603,6 +9590,23 @@
 </ds:datastoreItem>
 </file>
 
+<file path=customXml/itemProps2.xml><?xml version="1.0" encoding="utf-8"?>
+<ds:datastoreItem xmlns:ds="http://schemas.openxmlformats.org/officeDocument/2006/customXml" ds:itemID="{2D6C293B-B8B4-4284-A17E-9F9E4C32B25A}">
+  <ds:schemaRefs>
+    <ds:schemaRef ds:uri="http://schemas.microsoft.com/office/2006/documentManagement/types"/>
+    <ds:schemaRef ds:uri="http://purl.org/dc/elements/1.1/"/>
+    <ds:schemaRef ds:uri="http://purl.org/dc/terms/"/>
+    <ds:schemaRef ds:uri="http://purl.org/dc/dcmitype/"/>
+    <ds:schemaRef ds:uri="0e422b70-e85d-4377-8ee0-b6227433d381"/>
+    <ds:schemaRef ds:uri="http://schemas.microsoft.com/office/infopath/2007/PartnerControls"/>
+    <ds:schemaRef ds:uri="199f642e-5af9-486c-ac06-f366742ef41a"/>
+    <ds:schemaRef ds:uri="http://schemas.openxmlformats.org/package/2006/metadata/core-properties"/>
+    <ds:schemaRef ds:uri="http://schemas.microsoft.com/office/2006/metadata/properties"/>
+    <ds:schemaRef ds:uri="http://www.w3.org/XML/1998/namespace"/>
+  </ds:schemaRefs>
+</ds:datastoreItem>
+</file>
+
 <file path=customXml/itemProps3.xml><?xml version="1.0" encoding="utf-8"?>
 <ds:datastoreItem xmlns:ds="http://schemas.openxmlformats.org/officeDocument/2006/customXml" ds:itemID="{67DD9E9F-9EEB-4105-B29B-819486C2855A}">
   <ds:schemaRefs>
